--- a/9_general/9_Other.pptx
+++ b/9_general/9_Other.pptx
@@ -45,6 +45,11 @@
     <p:sldId id="794" r:id="rId39"/>
     <p:sldId id="796" r:id="rId40"/>
     <p:sldId id="797" r:id="rId41"/>
+    <p:sldId id="2668" r:id="rId42"/>
+    <p:sldId id="302" r:id="rId43"/>
+    <p:sldId id="2669" r:id="rId44"/>
+    <p:sldId id="2670" r:id="rId45"/>
+    <p:sldId id="2672" r:id="rId46"/>
   </p:sldIdLst>
   <p:sldSz cx="12192000" cy="6858000"/>
   <p:notesSz cx="6858000" cy="9144000"/>
@@ -300,7 +305,7 @@
           <a:p>
             <a:fld id="{D2BF5EA5-7B35-4081-8670-1468AC46983E}" type="datetimeFigureOut">
               <a:rPr lang="en-GB" smtClean="0"/>
-              <a:t>06/12/2025</a:t>
+              <a:t>07/12/2025</a:t>
             </a:fld>
             <a:endParaRPr lang="en-GB"/>
           </a:p>
@@ -500,7 +505,7 @@
           <a:p>
             <a:fld id="{D2BF5EA5-7B35-4081-8670-1468AC46983E}" type="datetimeFigureOut">
               <a:rPr lang="en-GB" smtClean="0"/>
-              <a:t>06/12/2025</a:t>
+              <a:t>07/12/2025</a:t>
             </a:fld>
             <a:endParaRPr lang="en-GB"/>
           </a:p>
@@ -710,7 +715,7 @@
           <a:p>
             <a:fld id="{D2BF5EA5-7B35-4081-8670-1468AC46983E}" type="datetimeFigureOut">
               <a:rPr lang="en-GB" smtClean="0"/>
-              <a:t>06/12/2025</a:t>
+              <a:t>07/12/2025</a:t>
             </a:fld>
             <a:endParaRPr lang="en-GB"/>
           </a:p>
@@ -910,7 +915,7 @@
           <a:p>
             <a:fld id="{D2BF5EA5-7B35-4081-8670-1468AC46983E}" type="datetimeFigureOut">
               <a:rPr lang="en-GB" smtClean="0"/>
-              <a:t>06/12/2025</a:t>
+              <a:t>07/12/2025</a:t>
             </a:fld>
             <a:endParaRPr lang="en-GB"/>
           </a:p>
@@ -1186,7 +1191,7 @@
           <a:p>
             <a:fld id="{D2BF5EA5-7B35-4081-8670-1468AC46983E}" type="datetimeFigureOut">
               <a:rPr lang="en-GB" smtClean="0"/>
-              <a:t>06/12/2025</a:t>
+              <a:t>07/12/2025</a:t>
             </a:fld>
             <a:endParaRPr lang="en-GB"/>
           </a:p>
@@ -1454,7 +1459,7 @@
           <a:p>
             <a:fld id="{D2BF5EA5-7B35-4081-8670-1468AC46983E}" type="datetimeFigureOut">
               <a:rPr lang="en-GB" smtClean="0"/>
-              <a:t>06/12/2025</a:t>
+              <a:t>07/12/2025</a:t>
             </a:fld>
             <a:endParaRPr lang="en-GB"/>
           </a:p>
@@ -1869,7 +1874,7 @@
           <a:p>
             <a:fld id="{D2BF5EA5-7B35-4081-8670-1468AC46983E}" type="datetimeFigureOut">
               <a:rPr lang="en-GB" smtClean="0"/>
-              <a:t>06/12/2025</a:t>
+              <a:t>07/12/2025</a:t>
             </a:fld>
             <a:endParaRPr lang="en-GB"/>
           </a:p>
@@ -2011,7 +2016,7 @@
           <a:p>
             <a:fld id="{D2BF5EA5-7B35-4081-8670-1468AC46983E}" type="datetimeFigureOut">
               <a:rPr lang="en-GB" smtClean="0"/>
-              <a:t>06/12/2025</a:t>
+              <a:t>07/12/2025</a:t>
             </a:fld>
             <a:endParaRPr lang="en-GB"/>
           </a:p>
@@ -2124,7 +2129,7 @@
           <a:p>
             <a:fld id="{D2BF5EA5-7B35-4081-8670-1468AC46983E}" type="datetimeFigureOut">
               <a:rPr lang="en-GB" smtClean="0"/>
-              <a:t>06/12/2025</a:t>
+              <a:t>07/12/2025</a:t>
             </a:fld>
             <a:endParaRPr lang="en-GB"/>
           </a:p>
@@ -2437,7 +2442,7 @@
           <a:p>
             <a:fld id="{D2BF5EA5-7B35-4081-8670-1468AC46983E}" type="datetimeFigureOut">
               <a:rPr lang="en-GB" smtClean="0"/>
-              <a:t>06/12/2025</a:t>
+              <a:t>07/12/2025</a:t>
             </a:fld>
             <a:endParaRPr lang="en-GB"/>
           </a:p>
@@ -2726,7 +2731,7 @@
           <a:p>
             <a:fld id="{D2BF5EA5-7B35-4081-8670-1468AC46983E}" type="datetimeFigureOut">
               <a:rPr lang="en-GB" smtClean="0"/>
-              <a:t>06/12/2025</a:t>
+              <a:t>07/12/2025</a:t>
             </a:fld>
             <a:endParaRPr lang="en-GB"/>
           </a:p>
@@ -2969,7 +2974,7 @@
           <a:p>
             <a:fld id="{D2BF5EA5-7B35-4081-8670-1468AC46983E}" type="datetimeFigureOut">
               <a:rPr lang="en-GB" smtClean="0"/>
-              <a:t>06/12/2025</a:t>
+              <a:t>07/12/2025</a:t>
             </a:fld>
             <a:endParaRPr lang="en-GB"/>
           </a:p>
@@ -33939,15 +33944,7 @@
             </a:r>
             <a:r>
               <a:rPr lang="en-IN" dirty="0"/>
-              <a:t>-embeddings -&gt; Configuration -&gt; text-embedding-3-small -&gt; Select Manual configuration -&gt; Change dimensions </a:t>
-            </a:r>
-            <a:r>
-              <a:rPr lang="en-IN"/>
-              <a:t>to 1536 </a:t>
-            </a:r>
-            <a:r>
-              <a:rPr lang="en-IN" dirty="0"/>
-              <a:t>(Because 512 is incorrectly filled by the UI) -&gt; Capacity mode -&gt; Serverless -&gt; Provider -&gt; AWS -&gt; Region -&gt; us-east-1 -&gt; Create index</a:t>
+              <a:t>-embeddings -&gt; Configuration -&gt; text-embedding-3-small -&gt; Select Manual configuration -&gt; Change dimensions to 1536 (Because 512 is incorrectly filled by the UI) -&gt; Capacity mode -&gt; Serverless -&gt; Provider -&gt; AWS -&gt; Region -&gt; us-east-1 -&gt; Create index</a:t>
             </a:r>
           </a:p>
           <a:p>
@@ -36201,6 +36198,4130 @@
     <p:extLst>
       <p:ext uri="{BB962C8B-B14F-4D97-AF65-F5344CB8AC3E}">
         <p14:creationId xmlns:p14="http://schemas.microsoft.com/office/powerpoint/2010/main" val="2538479038"/>
+      </p:ext>
+    </p:extLst>
+  </p:cSld>
+  <p:clrMapOvr>
+    <a:masterClrMapping/>
+  </p:clrMapOvr>
+</p:sld>
+</file>
+
+<file path=ppt/slides/slide41.xml><?xml version="1.0" encoding="utf-8"?>
+<p:sld xmlns:a="http://schemas.openxmlformats.org/drawingml/2006/main" xmlns:r="http://schemas.openxmlformats.org/officeDocument/2006/relationships" xmlns:p="http://schemas.openxmlformats.org/presentationml/2006/main">
+  <p:cSld>
+    <p:spTree>
+      <p:nvGrpSpPr>
+        <p:cNvPr id="1" name=""/>
+        <p:cNvGrpSpPr/>
+        <p:nvPr/>
+      </p:nvGrpSpPr>
+      <p:grpSpPr>
+        <a:xfrm>
+          <a:off x="0" y="0"/>
+          <a:ext cx="0" cy="0"/>
+          <a:chOff x="0" y="0"/>
+          <a:chExt cx="0" cy="0"/>
+        </a:xfrm>
+      </p:grpSpPr>
+      <p:sp>
+        <p:nvSpPr>
+          <p:cNvPr id="4" name="Title 3">
+            <a:extLst>
+              <a:ext uri="{FF2B5EF4-FFF2-40B4-BE49-F238E27FC236}">
+                <a16:creationId xmlns:a16="http://schemas.microsoft.com/office/drawing/2014/main" id="{CCE0D4FF-6D6A-5D2F-B735-7D1A5A18C9A5}"/>
+              </a:ext>
+            </a:extLst>
+          </p:cNvPr>
+          <p:cNvSpPr>
+            <a:spLocks noGrp="1"/>
+          </p:cNvSpPr>
+          <p:nvPr>
+            <p:ph type="title"/>
+          </p:nvPr>
+        </p:nvSpPr>
+        <p:spPr/>
+        <p:txBody>
+          <a:bodyPr/>
+          <a:lstStyle/>
+          <a:p>
+            <a:r>
+              <a:rPr lang="en-IN" dirty="0" err="1"/>
+              <a:t>LangChain</a:t>
+            </a:r>
+            <a:endParaRPr lang="en-GB" dirty="0"/>
+          </a:p>
+        </p:txBody>
+      </p:sp>
+      <p:sp>
+        <p:nvSpPr>
+          <p:cNvPr id="5" name="Text Placeholder 4">
+            <a:extLst>
+              <a:ext uri="{FF2B5EF4-FFF2-40B4-BE49-F238E27FC236}">
+                <a16:creationId xmlns:a16="http://schemas.microsoft.com/office/drawing/2014/main" id="{F6B2020F-9877-18C8-2C7E-BB0F08A66C07}"/>
+              </a:ext>
+            </a:extLst>
+          </p:cNvPr>
+          <p:cNvSpPr>
+            <a:spLocks noGrp="1"/>
+          </p:cNvSpPr>
+          <p:nvPr>
+            <p:ph type="body" idx="1"/>
+          </p:nvPr>
+        </p:nvSpPr>
+        <p:spPr/>
+        <p:txBody>
+          <a:bodyPr/>
+          <a:lstStyle/>
+          <a:p>
+            <a:endParaRPr lang="en-GB"/>
+          </a:p>
+        </p:txBody>
+      </p:sp>
+    </p:spTree>
+    <p:extLst>
+      <p:ext uri="{BB962C8B-B14F-4D97-AF65-F5344CB8AC3E}">
+        <p14:creationId xmlns:p14="http://schemas.microsoft.com/office/powerpoint/2010/main" val="866425900"/>
+      </p:ext>
+    </p:extLst>
+  </p:cSld>
+  <p:clrMapOvr>
+    <a:masterClrMapping/>
+  </p:clrMapOvr>
+</p:sld>
+</file>
+
+<file path=ppt/slides/slide42.xml><?xml version="1.0" encoding="utf-8"?>
+<p:sld xmlns:a="http://schemas.openxmlformats.org/drawingml/2006/main" xmlns:r="http://schemas.openxmlformats.org/officeDocument/2006/relationships" xmlns:p="http://schemas.openxmlformats.org/presentationml/2006/main">
+  <p:cSld>
+    <p:spTree>
+      <p:nvGrpSpPr>
+        <p:cNvPr id="1" name=""/>
+        <p:cNvGrpSpPr/>
+        <p:nvPr/>
+      </p:nvGrpSpPr>
+      <p:grpSpPr>
+        <a:xfrm>
+          <a:off x="0" y="0"/>
+          <a:ext cx="0" cy="0"/>
+          <a:chOff x="0" y="0"/>
+          <a:chExt cx="0" cy="0"/>
+        </a:xfrm>
+      </p:grpSpPr>
+      <p:sp>
+        <p:nvSpPr>
+          <p:cNvPr id="2" name="Title 1">
+            <a:extLst>
+              <a:ext uri="{FF2B5EF4-FFF2-40B4-BE49-F238E27FC236}">
+                <a16:creationId xmlns:a16="http://schemas.microsoft.com/office/drawing/2014/main" id="{3D7AB032-1470-C12B-7DEA-E0AA91E8592C}"/>
+              </a:ext>
+            </a:extLst>
+          </p:cNvPr>
+          <p:cNvSpPr>
+            <a:spLocks noGrp="1"/>
+          </p:cNvSpPr>
+          <p:nvPr>
+            <p:ph type="title"/>
+          </p:nvPr>
+        </p:nvSpPr>
+        <p:spPr/>
+        <p:txBody>
+          <a:bodyPr/>
+          <a:lstStyle/>
+          <a:p>
+            <a:r>
+              <a:rPr lang="en-IN" dirty="0" err="1"/>
+              <a:t>LangChain</a:t>
+            </a:r>
+            <a:endParaRPr lang="en-GB" dirty="0"/>
+          </a:p>
+        </p:txBody>
+      </p:sp>
+      <p:graphicFrame>
+        <p:nvGraphicFramePr>
+          <p:cNvPr id="4" name="Content Placeholder 3">
+            <a:extLst>
+              <a:ext uri="{FF2B5EF4-FFF2-40B4-BE49-F238E27FC236}">
+                <a16:creationId xmlns:a16="http://schemas.microsoft.com/office/drawing/2014/main" id="{6B0CFB9F-E282-C8F6-E8FA-5ABD0DCD980B}"/>
+              </a:ext>
+            </a:extLst>
+          </p:cNvPr>
+          <p:cNvGraphicFramePr>
+            <a:graphicFrameLocks noGrp="1"/>
+          </p:cNvGraphicFramePr>
+          <p:nvPr>
+            <p:ph idx="1"/>
+          </p:nvPr>
+        </p:nvGraphicFramePr>
+        <p:xfrm>
+          <a:off x="760836" y="1476617"/>
+          <a:ext cx="10463250" cy="5202632"/>
+        </p:xfrm>
+        <a:graphic>
+          <a:graphicData uri="http://schemas.openxmlformats.org/drawingml/2006/table">
+            <a:tbl>
+              <a:tblPr/>
+              <a:tblGrid>
+                <a:gridCol w="2331371">
+                  <a:extLst>
+                    <a:ext uri="{9D8B030D-6E8A-4147-A177-3AD203B41FA5}">
+                      <a16:colId xmlns:a16="http://schemas.microsoft.com/office/drawing/2014/main" val="534226007"/>
+                    </a:ext>
+                  </a:extLst>
+                </a:gridCol>
+                <a:gridCol w="3832104">
+                  <a:extLst>
+                    <a:ext uri="{9D8B030D-6E8A-4147-A177-3AD203B41FA5}">
+                      <a16:colId xmlns:a16="http://schemas.microsoft.com/office/drawing/2014/main" val="3759792275"/>
+                    </a:ext>
+                  </a:extLst>
+                </a:gridCol>
+                <a:gridCol w="4299775">
+                  <a:extLst>
+                    <a:ext uri="{9D8B030D-6E8A-4147-A177-3AD203B41FA5}">
+                      <a16:colId xmlns:a16="http://schemas.microsoft.com/office/drawing/2014/main" val="3597709871"/>
+                    </a:ext>
+                  </a:extLst>
+                </a:gridCol>
+              </a:tblGrid>
+              <a:tr h="290089">
+                <a:tc>
+                  <a:txBody>
+                    <a:bodyPr/>
+                    <a:lstStyle/>
+                    <a:p>
+                      <a:pPr>
+                        <a:buNone/>
+                      </a:pPr>
+                      <a:r>
+                        <a:rPr lang="en-GB" sz="1800" b="1" dirty="0"/>
+                        <a:t>Concept</a:t>
+                      </a:r>
+                    </a:p>
+                  </a:txBody>
+                  <a:tcPr marL="72522" marR="72522" marT="36261" marB="36261" anchor="ctr">
+                    <a:lnL w="12700" cap="flat" cmpd="sng" algn="ctr">
+                      <a:solidFill>
+                        <a:schemeClr val="tx1"/>
+                      </a:solidFill>
+                      <a:prstDash val="solid"/>
+                      <a:round/>
+                      <a:headEnd type="none" w="med" len="med"/>
+                      <a:tailEnd type="none" w="med" len="med"/>
+                    </a:lnL>
+                    <a:lnR w="12700" cap="flat" cmpd="sng" algn="ctr">
+                      <a:solidFill>
+                        <a:schemeClr val="tx1"/>
+                      </a:solidFill>
+                      <a:prstDash val="solid"/>
+                      <a:round/>
+                      <a:headEnd type="none" w="med" len="med"/>
+                      <a:tailEnd type="none" w="med" len="med"/>
+                    </a:lnR>
+                    <a:lnT w="12700" cap="flat" cmpd="sng" algn="ctr">
+                      <a:solidFill>
+                        <a:schemeClr val="tx1"/>
+                      </a:solidFill>
+                      <a:prstDash val="solid"/>
+                      <a:round/>
+                      <a:headEnd type="none" w="med" len="med"/>
+                      <a:tailEnd type="none" w="med" len="med"/>
+                    </a:lnT>
+                    <a:lnB w="12700" cap="flat" cmpd="sng" algn="ctr">
+                      <a:solidFill>
+                        <a:schemeClr val="tx1"/>
+                      </a:solidFill>
+                      <a:prstDash val="solid"/>
+                      <a:round/>
+                      <a:headEnd type="none" w="med" len="med"/>
+                      <a:tailEnd type="none" w="med" len="med"/>
+                    </a:lnB>
+                    <a:solidFill>
+                      <a:schemeClr val="accent4">
+                        <a:lumMod val="40000"/>
+                        <a:lumOff val="60000"/>
+                      </a:schemeClr>
+                    </a:solidFill>
+                  </a:tcPr>
+                </a:tc>
+                <a:tc>
+                  <a:txBody>
+                    <a:bodyPr/>
+                    <a:lstStyle/>
+                    <a:p>
+                      <a:pPr>
+                        <a:buNone/>
+                      </a:pPr>
+                      <a:r>
+                        <a:rPr lang="en-GB" sz="1800" b="1" dirty="0"/>
+                        <a:t>Description</a:t>
+                      </a:r>
+                    </a:p>
+                  </a:txBody>
+                  <a:tcPr marL="72522" marR="72522" marT="36261" marB="36261" anchor="ctr">
+                    <a:lnL w="12700" cap="flat" cmpd="sng" algn="ctr">
+                      <a:solidFill>
+                        <a:schemeClr val="tx1"/>
+                      </a:solidFill>
+                      <a:prstDash val="solid"/>
+                      <a:round/>
+                      <a:headEnd type="none" w="med" len="med"/>
+                      <a:tailEnd type="none" w="med" len="med"/>
+                    </a:lnL>
+                    <a:lnR w="12700" cap="flat" cmpd="sng" algn="ctr">
+                      <a:solidFill>
+                        <a:schemeClr val="tx1"/>
+                      </a:solidFill>
+                      <a:prstDash val="solid"/>
+                      <a:round/>
+                      <a:headEnd type="none" w="med" len="med"/>
+                      <a:tailEnd type="none" w="med" len="med"/>
+                    </a:lnR>
+                    <a:lnT w="12700" cap="flat" cmpd="sng" algn="ctr">
+                      <a:solidFill>
+                        <a:schemeClr val="tx1"/>
+                      </a:solidFill>
+                      <a:prstDash val="solid"/>
+                      <a:round/>
+                      <a:headEnd type="none" w="med" len="med"/>
+                      <a:tailEnd type="none" w="med" len="med"/>
+                    </a:lnT>
+                    <a:lnB w="12700" cap="flat" cmpd="sng" algn="ctr">
+                      <a:solidFill>
+                        <a:schemeClr val="tx1"/>
+                      </a:solidFill>
+                      <a:prstDash val="solid"/>
+                      <a:round/>
+                      <a:headEnd type="none" w="med" len="med"/>
+                      <a:tailEnd type="none" w="med" len="med"/>
+                    </a:lnB>
+                    <a:solidFill>
+                      <a:schemeClr val="accent4">
+                        <a:lumMod val="40000"/>
+                        <a:lumOff val="60000"/>
+                      </a:schemeClr>
+                    </a:solidFill>
+                  </a:tcPr>
+                </a:tc>
+                <a:tc>
+                  <a:txBody>
+                    <a:bodyPr/>
+                    <a:lstStyle/>
+                    <a:p>
+                      <a:pPr>
+                        <a:buNone/>
+                      </a:pPr>
+                      <a:r>
+                        <a:rPr lang="en-GB" sz="1800" b="1" dirty="0"/>
+                        <a:t>Example / Notes</a:t>
+                      </a:r>
+                    </a:p>
+                  </a:txBody>
+                  <a:tcPr marL="72522" marR="72522" marT="36261" marB="36261" anchor="ctr">
+                    <a:lnL w="12700" cap="flat" cmpd="sng" algn="ctr">
+                      <a:solidFill>
+                        <a:schemeClr val="tx1"/>
+                      </a:solidFill>
+                      <a:prstDash val="solid"/>
+                      <a:round/>
+                      <a:headEnd type="none" w="med" len="med"/>
+                      <a:tailEnd type="none" w="med" len="med"/>
+                    </a:lnL>
+                    <a:lnR w="12700" cap="flat" cmpd="sng" algn="ctr">
+                      <a:solidFill>
+                        <a:schemeClr val="tx1"/>
+                      </a:solidFill>
+                      <a:prstDash val="solid"/>
+                      <a:round/>
+                      <a:headEnd type="none" w="med" len="med"/>
+                      <a:tailEnd type="none" w="med" len="med"/>
+                    </a:lnR>
+                    <a:lnT w="12700" cap="flat" cmpd="sng" algn="ctr">
+                      <a:solidFill>
+                        <a:schemeClr val="tx1"/>
+                      </a:solidFill>
+                      <a:prstDash val="solid"/>
+                      <a:round/>
+                      <a:headEnd type="none" w="med" len="med"/>
+                      <a:tailEnd type="none" w="med" len="med"/>
+                    </a:lnT>
+                    <a:lnB w="12700" cap="flat" cmpd="sng" algn="ctr">
+                      <a:solidFill>
+                        <a:schemeClr val="tx1"/>
+                      </a:solidFill>
+                      <a:prstDash val="solid"/>
+                      <a:round/>
+                      <a:headEnd type="none" w="med" len="med"/>
+                      <a:tailEnd type="none" w="med" len="med"/>
+                    </a:lnB>
+                    <a:solidFill>
+                      <a:schemeClr val="accent4">
+                        <a:lumMod val="40000"/>
+                        <a:lumOff val="60000"/>
+                      </a:schemeClr>
+                    </a:solidFill>
+                  </a:tcPr>
+                </a:tc>
+                <a:extLst>
+                  <a:ext uri="{0D108BD9-81ED-4DB2-BD59-A6C34878D82A}">
+                    <a16:rowId xmlns:a16="http://schemas.microsoft.com/office/drawing/2014/main" val="1457039157"/>
+                  </a:ext>
+                </a:extLst>
+              </a:tr>
+              <a:tr h="507656">
+                <a:tc>
+                  <a:txBody>
+                    <a:bodyPr/>
+                    <a:lstStyle/>
+                    <a:p>
+                      <a:pPr>
+                        <a:buNone/>
+                      </a:pPr>
+                      <a:r>
+                        <a:rPr lang="en-GB" sz="1800" b="1"/>
+                        <a:t>LangChain</a:t>
+                      </a:r>
+                      <a:endParaRPr lang="en-GB" sz="1800"/>
+                    </a:p>
+                  </a:txBody>
+                  <a:tcPr marL="72522" marR="72522" marT="36261" marB="36261" anchor="ctr">
+                    <a:lnL w="12700" cap="flat" cmpd="sng" algn="ctr">
+                      <a:solidFill>
+                        <a:schemeClr val="tx1"/>
+                      </a:solidFill>
+                      <a:prstDash val="solid"/>
+                      <a:round/>
+                      <a:headEnd type="none" w="med" len="med"/>
+                      <a:tailEnd type="none" w="med" len="med"/>
+                    </a:lnL>
+                    <a:lnR w="12700" cap="flat" cmpd="sng" algn="ctr">
+                      <a:solidFill>
+                        <a:schemeClr val="tx1"/>
+                      </a:solidFill>
+                      <a:prstDash val="solid"/>
+                      <a:round/>
+                      <a:headEnd type="none" w="med" len="med"/>
+                      <a:tailEnd type="none" w="med" len="med"/>
+                    </a:lnR>
+                    <a:lnT w="12700" cap="flat" cmpd="sng" algn="ctr">
+                      <a:solidFill>
+                        <a:schemeClr val="tx1"/>
+                      </a:solidFill>
+                      <a:prstDash val="solid"/>
+                      <a:round/>
+                      <a:headEnd type="none" w="med" len="med"/>
+                      <a:tailEnd type="none" w="med" len="med"/>
+                    </a:lnT>
+                    <a:lnB w="12700" cap="flat" cmpd="sng" algn="ctr">
+                      <a:solidFill>
+                        <a:schemeClr val="tx1"/>
+                      </a:solidFill>
+                      <a:prstDash val="solid"/>
+                      <a:round/>
+                      <a:headEnd type="none" w="med" len="med"/>
+                      <a:tailEnd type="none" w="med" len="med"/>
+                    </a:lnB>
+                    <a:solidFill>
+                      <a:schemeClr val="accent4">
+                        <a:lumMod val="40000"/>
+                        <a:lumOff val="60000"/>
+                      </a:schemeClr>
+                    </a:solidFill>
+                  </a:tcPr>
+                </a:tc>
+                <a:tc>
+                  <a:txBody>
+                    <a:bodyPr/>
+                    <a:lstStyle/>
+                    <a:p>
+                      <a:pPr>
+                        <a:buNone/>
+                      </a:pPr>
+                      <a:r>
+                        <a:rPr lang="en-US" sz="1800"/>
+                        <a:t>A framework to build applications around LLMs</a:t>
+                      </a:r>
+                    </a:p>
+                  </a:txBody>
+                  <a:tcPr marL="72522" marR="72522" marT="36261" marB="36261" anchor="ctr">
+                    <a:lnL w="12700" cap="flat" cmpd="sng" algn="ctr">
+                      <a:solidFill>
+                        <a:schemeClr val="tx1"/>
+                      </a:solidFill>
+                      <a:prstDash val="solid"/>
+                      <a:round/>
+                      <a:headEnd type="none" w="med" len="med"/>
+                      <a:tailEnd type="none" w="med" len="med"/>
+                    </a:lnL>
+                    <a:lnR w="12700" cap="flat" cmpd="sng" algn="ctr">
+                      <a:solidFill>
+                        <a:schemeClr val="tx1"/>
+                      </a:solidFill>
+                      <a:prstDash val="solid"/>
+                      <a:round/>
+                      <a:headEnd type="none" w="med" len="med"/>
+                      <a:tailEnd type="none" w="med" len="med"/>
+                    </a:lnR>
+                    <a:lnT w="12700" cap="flat" cmpd="sng" algn="ctr">
+                      <a:solidFill>
+                        <a:schemeClr val="tx1"/>
+                      </a:solidFill>
+                      <a:prstDash val="solid"/>
+                      <a:round/>
+                      <a:headEnd type="none" w="med" len="med"/>
+                      <a:tailEnd type="none" w="med" len="med"/>
+                    </a:lnT>
+                    <a:lnB w="12700" cap="flat" cmpd="sng" algn="ctr">
+                      <a:solidFill>
+                        <a:schemeClr val="tx1"/>
+                      </a:solidFill>
+                      <a:prstDash val="solid"/>
+                      <a:round/>
+                      <a:headEnd type="none" w="med" len="med"/>
+                      <a:tailEnd type="none" w="med" len="med"/>
+                    </a:lnB>
+                    <a:solidFill>
+                      <a:schemeClr val="accent4">
+                        <a:lumMod val="40000"/>
+                        <a:lumOff val="60000"/>
+                      </a:schemeClr>
+                    </a:solidFill>
+                  </a:tcPr>
+                </a:tc>
+                <a:tc>
+                  <a:txBody>
+                    <a:bodyPr/>
+                    <a:lstStyle/>
+                    <a:p>
+                      <a:pPr>
+                        <a:buNone/>
+                      </a:pPr>
+                      <a:r>
+                        <a:rPr lang="en-US" sz="1800"/>
+                        <a:t>Helps manage prompts, chains, agents, and memory</a:t>
+                      </a:r>
+                    </a:p>
+                  </a:txBody>
+                  <a:tcPr marL="72522" marR="72522" marT="36261" marB="36261" anchor="ctr">
+                    <a:lnL w="12700" cap="flat" cmpd="sng" algn="ctr">
+                      <a:solidFill>
+                        <a:schemeClr val="tx1"/>
+                      </a:solidFill>
+                      <a:prstDash val="solid"/>
+                      <a:round/>
+                      <a:headEnd type="none" w="med" len="med"/>
+                      <a:tailEnd type="none" w="med" len="med"/>
+                    </a:lnL>
+                    <a:lnR w="12700" cap="flat" cmpd="sng" algn="ctr">
+                      <a:solidFill>
+                        <a:schemeClr val="tx1"/>
+                      </a:solidFill>
+                      <a:prstDash val="solid"/>
+                      <a:round/>
+                      <a:headEnd type="none" w="med" len="med"/>
+                      <a:tailEnd type="none" w="med" len="med"/>
+                    </a:lnR>
+                    <a:lnT w="12700" cap="flat" cmpd="sng" algn="ctr">
+                      <a:solidFill>
+                        <a:schemeClr val="tx1"/>
+                      </a:solidFill>
+                      <a:prstDash val="solid"/>
+                      <a:round/>
+                      <a:headEnd type="none" w="med" len="med"/>
+                      <a:tailEnd type="none" w="med" len="med"/>
+                    </a:lnT>
+                    <a:lnB w="12700" cap="flat" cmpd="sng" algn="ctr">
+                      <a:solidFill>
+                        <a:schemeClr val="tx1"/>
+                      </a:solidFill>
+                      <a:prstDash val="solid"/>
+                      <a:round/>
+                      <a:headEnd type="none" w="med" len="med"/>
+                      <a:tailEnd type="none" w="med" len="med"/>
+                    </a:lnB>
+                    <a:solidFill>
+                      <a:schemeClr val="accent4">
+                        <a:lumMod val="40000"/>
+                        <a:lumOff val="60000"/>
+                      </a:schemeClr>
+                    </a:solidFill>
+                  </a:tcPr>
+                </a:tc>
+                <a:extLst>
+                  <a:ext uri="{0D108BD9-81ED-4DB2-BD59-A6C34878D82A}">
+                    <a16:rowId xmlns:a16="http://schemas.microsoft.com/office/drawing/2014/main" val="1729297898"/>
+                  </a:ext>
+                </a:extLst>
+              </a:tr>
+              <a:tr h="507656">
+                <a:tc>
+                  <a:txBody>
+                    <a:bodyPr/>
+                    <a:lstStyle/>
+                    <a:p>
+                      <a:pPr>
+                        <a:buNone/>
+                      </a:pPr>
+                      <a:r>
+                        <a:rPr lang="en-GB" sz="1800" b="1"/>
+                        <a:t>LLM</a:t>
+                      </a:r>
+                      <a:endParaRPr lang="en-GB" sz="1800"/>
+                    </a:p>
+                  </a:txBody>
+                  <a:tcPr marL="72522" marR="72522" marT="36261" marB="36261" anchor="ctr">
+                    <a:lnL w="12700" cap="flat" cmpd="sng" algn="ctr">
+                      <a:solidFill>
+                        <a:schemeClr val="tx1"/>
+                      </a:solidFill>
+                      <a:prstDash val="solid"/>
+                      <a:round/>
+                      <a:headEnd type="none" w="med" len="med"/>
+                      <a:tailEnd type="none" w="med" len="med"/>
+                    </a:lnL>
+                    <a:lnR w="12700" cap="flat" cmpd="sng" algn="ctr">
+                      <a:solidFill>
+                        <a:schemeClr val="tx1"/>
+                      </a:solidFill>
+                      <a:prstDash val="solid"/>
+                      <a:round/>
+                      <a:headEnd type="none" w="med" len="med"/>
+                      <a:tailEnd type="none" w="med" len="med"/>
+                    </a:lnR>
+                    <a:lnT w="12700" cap="flat" cmpd="sng" algn="ctr">
+                      <a:solidFill>
+                        <a:schemeClr val="tx1"/>
+                      </a:solidFill>
+                      <a:prstDash val="solid"/>
+                      <a:round/>
+                      <a:headEnd type="none" w="med" len="med"/>
+                      <a:tailEnd type="none" w="med" len="med"/>
+                    </a:lnT>
+                    <a:lnB w="12700" cap="flat" cmpd="sng" algn="ctr">
+                      <a:solidFill>
+                        <a:schemeClr val="tx1"/>
+                      </a:solidFill>
+                      <a:prstDash val="solid"/>
+                      <a:round/>
+                      <a:headEnd type="none" w="med" len="med"/>
+                      <a:tailEnd type="none" w="med" len="med"/>
+                    </a:lnB>
+                    <a:solidFill>
+                      <a:schemeClr val="accent4">
+                        <a:lumMod val="40000"/>
+                        <a:lumOff val="60000"/>
+                      </a:schemeClr>
+                    </a:solidFill>
+                  </a:tcPr>
+                </a:tc>
+                <a:tc>
+                  <a:txBody>
+                    <a:bodyPr/>
+                    <a:lstStyle/>
+                    <a:p>
+                      <a:pPr>
+                        <a:buNone/>
+                      </a:pPr>
+                      <a:r>
+                        <a:rPr lang="en-US" sz="1800"/>
+                        <a:t>The core language model used for generating text</a:t>
+                      </a:r>
+                    </a:p>
+                  </a:txBody>
+                  <a:tcPr marL="72522" marR="72522" marT="36261" marB="36261" anchor="ctr">
+                    <a:lnL w="12700" cap="flat" cmpd="sng" algn="ctr">
+                      <a:solidFill>
+                        <a:schemeClr val="tx1"/>
+                      </a:solidFill>
+                      <a:prstDash val="solid"/>
+                      <a:round/>
+                      <a:headEnd type="none" w="med" len="med"/>
+                      <a:tailEnd type="none" w="med" len="med"/>
+                    </a:lnL>
+                    <a:lnR w="12700" cap="flat" cmpd="sng" algn="ctr">
+                      <a:solidFill>
+                        <a:schemeClr val="tx1"/>
+                      </a:solidFill>
+                      <a:prstDash val="solid"/>
+                      <a:round/>
+                      <a:headEnd type="none" w="med" len="med"/>
+                      <a:tailEnd type="none" w="med" len="med"/>
+                    </a:lnR>
+                    <a:lnT w="12700" cap="flat" cmpd="sng" algn="ctr">
+                      <a:solidFill>
+                        <a:schemeClr val="tx1"/>
+                      </a:solidFill>
+                      <a:prstDash val="solid"/>
+                      <a:round/>
+                      <a:headEnd type="none" w="med" len="med"/>
+                      <a:tailEnd type="none" w="med" len="med"/>
+                    </a:lnT>
+                    <a:lnB w="12700" cap="flat" cmpd="sng" algn="ctr">
+                      <a:solidFill>
+                        <a:schemeClr val="tx1"/>
+                      </a:solidFill>
+                      <a:prstDash val="solid"/>
+                      <a:round/>
+                      <a:headEnd type="none" w="med" len="med"/>
+                      <a:tailEnd type="none" w="med" len="med"/>
+                    </a:lnB>
+                    <a:solidFill>
+                      <a:schemeClr val="accent4">
+                        <a:lumMod val="40000"/>
+                        <a:lumOff val="60000"/>
+                      </a:schemeClr>
+                    </a:solidFill>
+                  </a:tcPr>
+                </a:tc>
+                <a:tc>
+                  <a:txBody>
+                    <a:bodyPr/>
+                    <a:lstStyle/>
+                    <a:p>
+                      <a:pPr>
+                        <a:buNone/>
+                      </a:pPr>
+                      <a:r>
+                        <a:rPr lang="en-GB" sz="1800"/>
+                        <a:t>OpenAI GPT, LLaMA, GPT-OSS</a:t>
+                      </a:r>
+                    </a:p>
+                  </a:txBody>
+                  <a:tcPr marL="72522" marR="72522" marT="36261" marB="36261" anchor="ctr">
+                    <a:lnL w="12700" cap="flat" cmpd="sng" algn="ctr">
+                      <a:solidFill>
+                        <a:schemeClr val="tx1"/>
+                      </a:solidFill>
+                      <a:prstDash val="solid"/>
+                      <a:round/>
+                      <a:headEnd type="none" w="med" len="med"/>
+                      <a:tailEnd type="none" w="med" len="med"/>
+                    </a:lnL>
+                    <a:lnR w="12700" cap="flat" cmpd="sng" algn="ctr">
+                      <a:solidFill>
+                        <a:schemeClr val="tx1"/>
+                      </a:solidFill>
+                      <a:prstDash val="solid"/>
+                      <a:round/>
+                      <a:headEnd type="none" w="med" len="med"/>
+                      <a:tailEnd type="none" w="med" len="med"/>
+                    </a:lnR>
+                    <a:lnT w="12700" cap="flat" cmpd="sng" algn="ctr">
+                      <a:solidFill>
+                        <a:schemeClr val="tx1"/>
+                      </a:solidFill>
+                      <a:prstDash val="solid"/>
+                      <a:round/>
+                      <a:headEnd type="none" w="med" len="med"/>
+                      <a:tailEnd type="none" w="med" len="med"/>
+                    </a:lnT>
+                    <a:lnB w="12700" cap="flat" cmpd="sng" algn="ctr">
+                      <a:solidFill>
+                        <a:schemeClr val="tx1"/>
+                      </a:solidFill>
+                      <a:prstDash val="solid"/>
+                      <a:round/>
+                      <a:headEnd type="none" w="med" len="med"/>
+                      <a:tailEnd type="none" w="med" len="med"/>
+                    </a:lnB>
+                    <a:solidFill>
+                      <a:schemeClr val="accent4">
+                        <a:lumMod val="40000"/>
+                        <a:lumOff val="60000"/>
+                      </a:schemeClr>
+                    </a:solidFill>
+                  </a:tcPr>
+                </a:tc>
+                <a:extLst>
+                  <a:ext uri="{0D108BD9-81ED-4DB2-BD59-A6C34878D82A}">
+                    <a16:rowId xmlns:a16="http://schemas.microsoft.com/office/drawing/2014/main" val="2050542193"/>
+                  </a:ext>
+                </a:extLst>
+              </a:tr>
+              <a:tr h="507656">
+                <a:tc>
+                  <a:txBody>
+                    <a:bodyPr/>
+                    <a:lstStyle/>
+                    <a:p>
+                      <a:pPr>
+                        <a:buNone/>
+                      </a:pPr>
+                      <a:r>
+                        <a:rPr lang="en-GB" sz="1800" b="1"/>
+                        <a:t>Prompt</a:t>
+                      </a:r>
+                      <a:endParaRPr lang="en-GB" sz="1800"/>
+                    </a:p>
+                  </a:txBody>
+                  <a:tcPr marL="72522" marR="72522" marT="36261" marB="36261" anchor="ctr">
+                    <a:lnL w="12700" cap="flat" cmpd="sng" algn="ctr">
+                      <a:solidFill>
+                        <a:schemeClr val="tx1"/>
+                      </a:solidFill>
+                      <a:prstDash val="solid"/>
+                      <a:round/>
+                      <a:headEnd type="none" w="med" len="med"/>
+                      <a:tailEnd type="none" w="med" len="med"/>
+                    </a:lnL>
+                    <a:lnR w="12700" cap="flat" cmpd="sng" algn="ctr">
+                      <a:solidFill>
+                        <a:schemeClr val="tx1"/>
+                      </a:solidFill>
+                      <a:prstDash val="solid"/>
+                      <a:round/>
+                      <a:headEnd type="none" w="med" len="med"/>
+                      <a:tailEnd type="none" w="med" len="med"/>
+                    </a:lnR>
+                    <a:lnT w="12700" cap="flat" cmpd="sng" algn="ctr">
+                      <a:solidFill>
+                        <a:schemeClr val="tx1"/>
+                      </a:solidFill>
+                      <a:prstDash val="solid"/>
+                      <a:round/>
+                      <a:headEnd type="none" w="med" len="med"/>
+                      <a:tailEnd type="none" w="med" len="med"/>
+                    </a:lnT>
+                    <a:lnB w="12700" cap="flat" cmpd="sng" algn="ctr">
+                      <a:solidFill>
+                        <a:schemeClr val="tx1"/>
+                      </a:solidFill>
+                      <a:prstDash val="solid"/>
+                      <a:round/>
+                      <a:headEnd type="none" w="med" len="med"/>
+                      <a:tailEnd type="none" w="med" len="med"/>
+                    </a:lnB>
+                    <a:solidFill>
+                      <a:schemeClr val="accent4">
+                        <a:lumMod val="40000"/>
+                        <a:lumOff val="60000"/>
+                      </a:schemeClr>
+                    </a:solidFill>
+                  </a:tcPr>
+                </a:tc>
+                <a:tc>
+                  <a:txBody>
+                    <a:bodyPr/>
+                    <a:lstStyle/>
+                    <a:p>
+                      <a:pPr>
+                        <a:buNone/>
+                      </a:pPr>
+                      <a:r>
+                        <a:rPr lang="en-US" sz="1800"/>
+                        <a:t>Input text or instructions for the LLM</a:t>
+                      </a:r>
+                    </a:p>
+                  </a:txBody>
+                  <a:tcPr marL="72522" marR="72522" marT="36261" marB="36261" anchor="ctr">
+                    <a:lnL w="12700" cap="flat" cmpd="sng" algn="ctr">
+                      <a:solidFill>
+                        <a:schemeClr val="tx1"/>
+                      </a:solidFill>
+                      <a:prstDash val="solid"/>
+                      <a:round/>
+                      <a:headEnd type="none" w="med" len="med"/>
+                      <a:tailEnd type="none" w="med" len="med"/>
+                    </a:lnL>
+                    <a:lnR w="12700" cap="flat" cmpd="sng" algn="ctr">
+                      <a:solidFill>
+                        <a:schemeClr val="tx1"/>
+                      </a:solidFill>
+                      <a:prstDash val="solid"/>
+                      <a:round/>
+                      <a:headEnd type="none" w="med" len="med"/>
+                      <a:tailEnd type="none" w="med" len="med"/>
+                    </a:lnR>
+                    <a:lnT w="12700" cap="flat" cmpd="sng" algn="ctr">
+                      <a:solidFill>
+                        <a:schemeClr val="tx1"/>
+                      </a:solidFill>
+                      <a:prstDash val="solid"/>
+                      <a:round/>
+                      <a:headEnd type="none" w="med" len="med"/>
+                      <a:tailEnd type="none" w="med" len="med"/>
+                    </a:lnT>
+                    <a:lnB w="12700" cap="flat" cmpd="sng" algn="ctr">
+                      <a:solidFill>
+                        <a:schemeClr val="tx1"/>
+                      </a:solidFill>
+                      <a:prstDash val="solid"/>
+                      <a:round/>
+                      <a:headEnd type="none" w="med" len="med"/>
+                      <a:tailEnd type="none" w="med" len="med"/>
+                    </a:lnB>
+                    <a:solidFill>
+                      <a:schemeClr val="accent4">
+                        <a:lumMod val="40000"/>
+                        <a:lumOff val="60000"/>
+                      </a:schemeClr>
+                    </a:solidFill>
+                  </a:tcPr>
+                </a:tc>
+                <a:tc>
+                  <a:txBody>
+                    <a:bodyPr/>
+                    <a:lstStyle/>
+                    <a:p>
+                      <a:pPr>
+                        <a:buNone/>
+                      </a:pPr>
+                      <a:r>
+                        <a:rPr lang="en-US" sz="1800">
+                          <a:latin typeface="Courier New" panose="02070309020205020404" pitchFamily="49" charset="0"/>
+                        </a:rPr>
+                        <a:t>"Summarize this text in one sentence"</a:t>
+                      </a:r>
+                      <a:endParaRPr lang="en-US" sz="1800"/>
+                    </a:p>
+                  </a:txBody>
+                  <a:tcPr marL="72522" marR="72522" marT="36261" marB="36261" anchor="ctr">
+                    <a:lnL w="12700" cap="flat" cmpd="sng" algn="ctr">
+                      <a:solidFill>
+                        <a:schemeClr val="tx1"/>
+                      </a:solidFill>
+                      <a:prstDash val="solid"/>
+                      <a:round/>
+                      <a:headEnd type="none" w="med" len="med"/>
+                      <a:tailEnd type="none" w="med" len="med"/>
+                    </a:lnL>
+                    <a:lnR w="12700" cap="flat" cmpd="sng" algn="ctr">
+                      <a:solidFill>
+                        <a:schemeClr val="tx1"/>
+                      </a:solidFill>
+                      <a:prstDash val="solid"/>
+                      <a:round/>
+                      <a:headEnd type="none" w="med" len="med"/>
+                      <a:tailEnd type="none" w="med" len="med"/>
+                    </a:lnR>
+                    <a:lnT w="12700" cap="flat" cmpd="sng" algn="ctr">
+                      <a:solidFill>
+                        <a:schemeClr val="tx1"/>
+                      </a:solidFill>
+                      <a:prstDash val="solid"/>
+                      <a:round/>
+                      <a:headEnd type="none" w="med" len="med"/>
+                      <a:tailEnd type="none" w="med" len="med"/>
+                    </a:lnT>
+                    <a:lnB w="12700" cap="flat" cmpd="sng" algn="ctr">
+                      <a:solidFill>
+                        <a:schemeClr val="tx1"/>
+                      </a:solidFill>
+                      <a:prstDash val="solid"/>
+                      <a:round/>
+                      <a:headEnd type="none" w="med" len="med"/>
+                      <a:tailEnd type="none" w="med" len="med"/>
+                    </a:lnB>
+                    <a:solidFill>
+                      <a:schemeClr val="accent4">
+                        <a:lumMod val="40000"/>
+                        <a:lumOff val="60000"/>
+                      </a:schemeClr>
+                    </a:solidFill>
+                  </a:tcPr>
+                </a:tc>
+                <a:extLst>
+                  <a:ext uri="{0D108BD9-81ED-4DB2-BD59-A6C34878D82A}">
+                    <a16:rowId xmlns:a16="http://schemas.microsoft.com/office/drawing/2014/main" val="542831639"/>
+                  </a:ext>
+                </a:extLst>
+              </a:tr>
+              <a:tr h="507656">
+                <a:tc>
+                  <a:txBody>
+                    <a:bodyPr/>
+                    <a:lstStyle/>
+                    <a:p>
+                      <a:pPr>
+                        <a:buNone/>
+                      </a:pPr>
+                      <a:r>
+                        <a:rPr lang="en-GB" sz="1800" b="1"/>
+                        <a:t>Chain</a:t>
+                      </a:r>
+                      <a:endParaRPr lang="en-GB" sz="1800"/>
+                    </a:p>
+                  </a:txBody>
+                  <a:tcPr marL="72522" marR="72522" marT="36261" marB="36261" anchor="ctr">
+                    <a:lnL w="12700" cap="flat" cmpd="sng" algn="ctr">
+                      <a:solidFill>
+                        <a:schemeClr val="tx1"/>
+                      </a:solidFill>
+                      <a:prstDash val="solid"/>
+                      <a:round/>
+                      <a:headEnd type="none" w="med" len="med"/>
+                      <a:tailEnd type="none" w="med" len="med"/>
+                    </a:lnL>
+                    <a:lnR w="12700" cap="flat" cmpd="sng" algn="ctr">
+                      <a:solidFill>
+                        <a:schemeClr val="tx1"/>
+                      </a:solidFill>
+                      <a:prstDash val="solid"/>
+                      <a:round/>
+                      <a:headEnd type="none" w="med" len="med"/>
+                      <a:tailEnd type="none" w="med" len="med"/>
+                    </a:lnR>
+                    <a:lnT w="12700" cap="flat" cmpd="sng" algn="ctr">
+                      <a:solidFill>
+                        <a:schemeClr val="tx1"/>
+                      </a:solidFill>
+                      <a:prstDash val="solid"/>
+                      <a:round/>
+                      <a:headEnd type="none" w="med" len="med"/>
+                      <a:tailEnd type="none" w="med" len="med"/>
+                    </a:lnT>
+                    <a:lnB w="12700" cap="flat" cmpd="sng" algn="ctr">
+                      <a:solidFill>
+                        <a:schemeClr val="tx1"/>
+                      </a:solidFill>
+                      <a:prstDash val="solid"/>
+                      <a:round/>
+                      <a:headEnd type="none" w="med" len="med"/>
+                      <a:tailEnd type="none" w="med" len="med"/>
+                    </a:lnB>
+                    <a:solidFill>
+                      <a:schemeClr val="accent4">
+                        <a:lumMod val="40000"/>
+                        <a:lumOff val="60000"/>
+                      </a:schemeClr>
+                    </a:solidFill>
+                  </a:tcPr>
+                </a:tc>
+                <a:tc>
+                  <a:txBody>
+                    <a:bodyPr/>
+                    <a:lstStyle/>
+                    <a:p>
+                      <a:pPr>
+                        <a:buNone/>
+                      </a:pPr>
+                      <a:r>
+                        <a:rPr lang="en-US" sz="1800"/>
+                        <a:t>Sequence of steps combining multiple LLM calls or processing</a:t>
+                      </a:r>
+                    </a:p>
+                  </a:txBody>
+                  <a:tcPr marL="72522" marR="72522" marT="36261" marB="36261" anchor="ctr">
+                    <a:lnL w="12700" cap="flat" cmpd="sng" algn="ctr">
+                      <a:solidFill>
+                        <a:schemeClr val="tx1"/>
+                      </a:solidFill>
+                      <a:prstDash val="solid"/>
+                      <a:round/>
+                      <a:headEnd type="none" w="med" len="med"/>
+                      <a:tailEnd type="none" w="med" len="med"/>
+                    </a:lnL>
+                    <a:lnR w="12700" cap="flat" cmpd="sng" algn="ctr">
+                      <a:solidFill>
+                        <a:schemeClr val="tx1"/>
+                      </a:solidFill>
+                      <a:prstDash val="solid"/>
+                      <a:round/>
+                      <a:headEnd type="none" w="med" len="med"/>
+                      <a:tailEnd type="none" w="med" len="med"/>
+                    </a:lnR>
+                    <a:lnT w="12700" cap="flat" cmpd="sng" algn="ctr">
+                      <a:solidFill>
+                        <a:schemeClr val="tx1"/>
+                      </a:solidFill>
+                      <a:prstDash val="solid"/>
+                      <a:round/>
+                      <a:headEnd type="none" w="med" len="med"/>
+                      <a:tailEnd type="none" w="med" len="med"/>
+                    </a:lnT>
+                    <a:lnB w="12700" cap="flat" cmpd="sng" algn="ctr">
+                      <a:solidFill>
+                        <a:schemeClr val="tx1"/>
+                      </a:solidFill>
+                      <a:prstDash val="solid"/>
+                      <a:round/>
+                      <a:headEnd type="none" w="med" len="med"/>
+                      <a:tailEnd type="none" w="med" len="med"/>
+                    </a:lnB>
+                    <a:solidFill>
+                      <a:schemeClr val="accent4">
+                        <a:lumMod val="40000"/>
+                        <a:lumOff val="60000"/>
+                      </a:schemeClr>
+                    </a:solidFill>
+                  </a:tcPr>
+                </a:tc>
+                <a:tc>
+                  <a:txBody>
+                    <a:bodyPr/>
+                    <a:lstStyle/>
+                    <a:p>
+                      <a:pPr>
+                        <a:buNone/>
+                      </a:pPr>
+                      <a:r>
+                        <a:rPr lang="en-GB" sz="1800"/>
+                        <a:t>Summarization → Translation → Formatting</a:t>
+                      </a:r>
+                    </a:p>
+                  </a:txBody>
+                  <a:tcPr marL="72522" marR="72522" marT="36261" marB="36261" anchor="ctr">
+                    <a:lnL w="12700" cap="flat" cmpd="sng" algn="ctr">
+                      <a:solidFill>
+                        <a:schemeClr val="tx1"/>
+                      </a:solidFill>
+                      <a:prstDash val="solid"/>
+                      <a:round/>
+                      <a:headEnd type="none" w="med" len="med"/>
+                      <a:tailEnd type="none" w="med" len="med"/>
+                    </a:lnL>
+                    <a:lnR w="12700" cap="flat" cmpd="sng" algn="ctr">
+                      <a:solidFill>
+                        <a:schemeClr val="tx1"/>
+                      </a:solidFill>
+                      <a:prstDash val="solid"/>
+                      <a:round/>
+                      <a:headEnd type="none" w="med" len="med"/>
+                      <a:tailEnd type="none" w="med" len="med"/>
+                    </a:lnR>
+                    <a:lnT w="12700" cap="flat" cmpd="sng" algn="ctr">
+                      <a:solidFill>
+                        <a:schemeClr val="tx1"/>
+                      </a:solidFill>
+                      <a:prstDash val="solid"/>
+                      <a:round/>
+                      <a:headEnd type="none" w="med" len="med"/>
+                      <a:tailEnd type="none" w="med" len="med"/>
+                    </a:lnT>
+                    <a:lnB w="12700" cap="flat" cmpd="sng" algn="ctr">
+                      <a:solidFill>
+                        <a:schemeClr val="tx1"/>
+                      </a:solidFill>
+                      <a:prstDash val="solid"/>
+                      <a:round/>
+                      <a:headEnd type="none" w="med" len="med"/>
+                      <a:tailEnd type="none" w="med" len="med"/>
+                    </a:lnB>
+                    <a:solidFill>
+                      <a:schemeClr val="accent4">
+                        <a:lumMod val="40000"/>
+                        <a:lumOff val="60000"/>
+                      </a:schemeClr>
+                    </a:solidFill>
+                  </a:tcPr>
+                </a:tc>
+                <a:extLst>
+                  <a:ext uri="{0D108BD9-81ED-4DB2-BD59-A6C34878D82A}">
+                    <a16:rowId xmlns:a16="http://schemas.microsoft.com/office/drawing/2014/main" val="3021193434"/>
+                  </a:ext>
+                </a:extLst>
+              </a:tr>
+              <a:tr h="507656">
+                <a:tc>
+                  <a:txBody>
+                    <a:bodyPr/>
+                    <a:lstStyle/>
+                    <a:p>
+                      <a:pPr>
+                        <a:buNone/>
+                      </a:pPr>
+                      <a:r>
+                        <a:rPr lang="en-GB" sz="1800" b="1"/>
+                        <a:t>Agent</a:t>
+                      </a:r>
+                      <a:endParaRPr lang="en-GB" sz="1800"/>
+                    </a:p>
+                  </a:txBody>
+                  <a:tcPr marL="72522" marR="72522" marT="36261" marB="36261" anchor="ctr">
+                    <a:lnL w="12700" cap="flat" cmpd="sng" algn="ctr">
+                      <a:solidFill>
+                        <a:schemeClr val="tx1"/>
+                      </a:solidFill>
+                      <a:prstDash val="solid"/>
+                      <a:round/>
+                      <a:headEnd type="none" w="med" len="med"/>
+                      <a:tailEnd type="none" w="med" len="med"/>
+                    </a:lnL>
+                    <a:lnR w="12700" cap="flat" cmpd="sng" algn="ctr">
+                      <a:solidFill>
+                        <a:schemeClr val="tx1"/>
+                      </a:solidFill>
+                      <a:prstDash val="solid"/>
+                      <a:round/>
+                      <a:headEnd type="none" w="med" len="med"/>
+                      <a:tailEnd type="none" w="med" len="med"/>
+                    </a:lnR>
+                    <a:lnT w="12700" cap="flat" cmpd="sng" algn="ctr">
+                      <a:solidFill>
+                        <a:schemeClr val="tx1"/>
+                      </a:solidFill>
+                      <a:prstDash val="solid"/>
+                      <a:round/>
+                      <a:headEnd type="none" w="med" len="med"/>
+                      <a:tailEnd type="none" w="med" len="med"/>
+                    </a:lnT>
+                    <a:lnB w="12700" cap="flat" cmpd="sng" algn="ctr">
+                      <a:solidFill>
+                        <a:schemeClr val="tx1"/>
+                      </a:solidFill>
+                      <a:prstDash val="solid"/>
+                      <a:round/>
+                      <a:headEnd type="none" w="med" len="med"/>
+                      <a:tailEnd type="none" w="med" len="med"/>
+                    </a:lnB>
+                    <a:solidFill>
+                      <a:schemeClr val="accent4">
+                        <a:lumMod val="40000"/>
+                        <a:lumOff val="60000"/>
+                      </a:schemeClr>
+                    </a:solidFill>
+                  </a:tcPr>
+                </a:tc>
+                <a:tc>
+                  <a:txBody>
+                    <a:bodyPr/>
+                    <a:lstStyle/>
+                    <a:p>
+                      <a:pPr>
+                        <a:buNone/>
+                      </a:pPr>
+                      <a:r>
+                        <a:rPr lang="en-US" sz="1800"/>
+                        <a:t>LLM that can take actions using logic or tools</a:t>
+                      </a:r>
+                    </a:p>
+                  </a:txBody>
+                  <a:tcPr marL="72522" marR="72522" marT="36261" marB="36261" anchor="ctr">
+                    <a:lnL w="12700" cap="flat" cmpd="sng" algn="ctr">
+                      <a:solidFill>
+                        <a:schemeClr val="tx1"/>
+                      </a:solidFill>
+                      <a:prstDash val="solid"/>
+                      <a:round/>
+                      <a:headEnd type="none" w="med" len="med"/>
+                      <a:tailEnd type="none" w="med" len="med"/>
+                    </a:lnL>
+                    <a:lnR w="12700" cap="flat" cmpd="sng" algn="ctr">
+                      <a:solidFill>
+                        <a:schemeClr val="tx1"/>
+                      </a:solidFill>
+                      <a:prstDash val="solid"/>
+                      <a:round/>
+                      <a:headEnd type="none" w="med" len="med"/>
+                      <a:tailEnd type="none" w="med" len="med"/>
+                    </a:lnR>
+                    <a:lnT w="12700" cap="flat" cmpd="sng" algn="ctr">
+                      <a:solidFill>
+                        <a:schemeClr val="tx1"/>
+                      </a:solidFill>
+                      <a:prstDash val="solid"/>
+                      <a:round/>
+                      <a:headEnd type="none" w="med" len="med"/>
+                      <a:tailEnd type="none" w="med" len="med"/>
+                    </a:lnT>
+                    <a:lnB w="12700" cap="flat" cmpd="sng" algn="ctr">
+                      <a:solidFill>
+                        <a:schemeClr val="tx1"/>
+                      </a:solidFill>
+                      <a:prstDash val="solid"/>
+                      <a:round/>
+                      <a:headEnd type="none" w="med" len="med"/>
+                      <a:tailEnd type="none" w="med" len="med"/>
+                    </a:lnB>
+                    <a:solidFill>
+                      <a:schemeClr val="accent4">
+                        <a:lumMod val="40000"/>
+                        <a:lumOff val="60000"/>
+                      </a:schemeClr>
+                    </a:solidFill>
+                  </a:tcPr>
+                </a:tc>
+                <a:tc>
+                  <a:txBody>
+                    <a:bodyPr/>
+                    <a:lstStyle/>
+                    <a:p>
+                      <a:pPr>
+                        <a:buNone/>
+                      </a:pPr>
+                      <a:r>
+                        <a:rPr lang="en-GB" sz="1800"/>
+                        <a:t>Calculator agent, QA agent</a:t>
+                      </a:r>
+                    </a:p>
+                  </a:txBody>
+                  <a:tcPr marL="72522" marR="72522" marT="36261" marB="36261" anchor="ctr">
+                    <a:lnL w="12700" cap="flat" cmpd="sng" algn="ctr">
+                      <a:solidFill>
+                        <a:schemeClr val="tx1"/>
+                      </a:solidFill>
+                      <a:prstDash val="solid"/>
+                      <a:round/>
+                      <a:headEnd type="none" w="med" len="med"/>
+                      <a:tailEnd type="none" w="med" len="med"/>
+                    </a:lnL>
+                    <a:lnR w="12700" cap="flat" cmpd="sng" algn="ctr">
+                      <a:solidFill>
+                        <a:schemeClr val="tx1"/>
+                      </a:solidFill>
+                      <a:prstDash val="solid"/>
+                      <a:round/>
+                      <a:headEnd type="none" w="med" len="med"/>
+                      <a:tailEnd type="none" w="med" len="med"/>
+                    </a:lnR>
+                    <a:lnT w="12700" cap="flat" cmpd="sng" algn="ctr">
+                      <a:solidFill>
+                        <a:schemeClr val="tx1"/>
+                      </a:solidFill>
+                      <a:prstDash val="solid"/>
+                      <a:round/>
+                      <a:headEnd type="none" w="med" len="med"/>
+                      <a:tailEnd type="none" w="med" len="med"/>
+                    </a:lnT>
+                    <a:lnB w="12700" cap="flat" cmpd="sng" algn="ctr">
+                      <a:solidFill>
+                        <a:schemeClr val="tx1"/>
+                      </a:solidFill>
+                      <a:prstDash val="solid"/>
+                      <a:round/>
+                      <a:headEnd type="none" w="med" len="med"/>
+                      <a:tailEnd type="none" w="med" len="med"/>
+                    </a:lnB>
+                    <a:solidFill>
+                      <a:schemeClr val="accent4">
+                        <a:lumMod val="40000"/>
+                        <a:lumOff val="60000"/>
+                      </a:schemeClr>
+                    </a:solidFill>
+                  </a:tcPr>
+                </a:tc>
+                <a:extLst>
+                  <a:ext uri="{0D108BD9-81ED-4DB2-BD59-A6C34878D82A}">
+                    <a16:rowId xmlns:a16="http://schemas.microsoft.com/office/drawing/2014/main" val="2522013484"/>
+                  </a:ext>
+                </a:extLst>
+              </a:tr>
+              <a:tr h="507656">
+                <a:tc>
+                  <a:txBody>
+                    <a:bodyPr/>
+                    <a:lstStyle/>
+                    <a:p>
+                      <a:pPr>
+                        <a:buNone/>
+                      </a:pPr>
+                      <a:r>
+                        <a:rPr lang="en-GB" sz="1800" b="1"/>
+                        <a:t>Memory</a:t>
+                      </a:r>
+                      <a:endParaRPr lang="en-GB" sz="1800"/>
+                    </a:p>
+                  </a:txBody>
+                  <a:tcPr marL="72522" marR="72522" marT="36261" marB="36261" anchor="ctr">
+                    <a:lnL w="12700" cap="flat" cmpd="sng" algn="ctr">
+                      <a:solidFill>
+                        <a:schemeClr val="tx1"/>
+                      </a:solidFill>
+                      <a:prstDash val="solid"/>
+                      <a:round/>
+                      <a:headEnd type="none" w="med" len="med"/>
+                      <a:tailEnd type="none" w="med" len="med"/>
+                    </a:lnL>
+                    <a:lnR w="12700" cap="flat" cmpd="sng" algn="ctr">
+                      <a:solidFill>
+                        <a:schemeClr val="tx1"/>
+                      </a:solidFill>
+                      <a:prstDash val="solid"/>
+                      <a:round/>
+                      <a:headEnd type="none" w="med" len="med"/>
+                      <a:tailEnd type="none" w="med" len="med"/>
+                    </a:lnR>
+                    <a:lnT w="12700" cap="flat" cmpd="sng" algn="ctr">
+                      <a:solidFill>
+                        <a:schemeClr val="tx1"/>
+                      </a:solidFill>
+                      <a:prstDash val="solid"/>
+                      <a:round/>
+                      <a:headEnd type="none" w="med" len="med"/>
+                      <a:tailEnd type="none" w="med" len="med"/>
+                    </a:lnT>
+                    <a:lnB w="12700" cap="flat" cmpd="sng" algn="ctr">
+                      <a:solidFill>
+                        <a:schemeClr val="tx1"/>
+                      </a:solidFill>
+                      <a:prstDash val="solid"/>
+                      <a:round/>
+                      <a:headEnd type="none" w="med" len="med"/>
+                      <a:tailEnd type="none" w="med" len="med"/>
+                    </a:lnB>
+                    <a:solidFill>
+                      <a:schemeClr val="accent4">
+                        <a:lumMod val="40000"/>
+                        <a:lumOff val="60000"/>
+                      </a:schemeClr>
+                    </a:solidFill>
+                  </a:tcPr>
+                </a:tc>
+                <a:tc>
+                  <a:txBody>
+                    <a:bodyPr/>
+                    <a:lstStyle/>
+                    <a:p>
+                      <a:pPr>
+                        <a:buNone/>
+                      </a:pPr>
+                      <a:r>
+                        <a:rPr lang="en-US" sz="1800"/>
+                        <a:t>Keeps context across multiple interactions</a:t>
+                      </a:r>
+                    </a:p>
+                  </a:txBody>
+                  <a:tcPr marL="72522" marR="72522" marT="36261" marB="36261" anchor="ctr">
+                    <a:lnL w="12700" cap="flat" cmpd="sng" algn="ctr">
+                      <a:solidFill>
+                        <a:schemeClr val="tx1"/>
+                      </a:solidFill>
+                      <a:prstDash val="solid"/>
+                      <a:round/>
+                      <a:headEnd type="none" w="med" len="med"/>
+                      <a:tailEnd type="none" w="med" len="med"/>
+                    </a:lnL>
+                    <a:lnR w="12700" cap="flat" cmpd="sng" algn="ctr">
+                      <a:solidFill>
+                        <a:schemeClr val="tx1"/>
+                      </a:solidFill>
+                      <a:prstDash val="solid"/>
+                      <a:round/>
+                      <a:headEnd type="none" w="med" len="med"/>
+                      <a:tailEnd type="none" w="med" len="med"/>
+                    </a:lnR>
+                    <a:lnT w="12700" cap="flat" cmpd="sng" algn="ctr">
+                      <a:solidFill>
+                        <a:schemeClr val="tx1"/>
+                      </a:solidFill>
+                      <a:prstDash val="solid"/>
+                      <a:round/>
+                      <a:headEnd type="none" w="med" len="med"/>
+                      <a:tailEnd type="none" w="med" len="med"/>
+                    </a:lnT>
+                    <a:lnB w="12700" cap="flat" cmpd="sng" algn="ctr">
+                      <a:solidFill>
+                        <a:schemeClr val="tx1"/>
+                      </a:solidFill>
+                      <a:prstDash val="solid"/>
+                      <a:round/>
+                      <a:headEnd type="none" w="med" len="med"/>
+                      <a:tailEnd type="none" w="med" len="med"/>
+                    </a:lnB>
+                    <a:solidFill>
+                      <a:schemeClr val="accent4">
+                        <a:lumMod val="40000"/>
+                        <a:lumOff val="60000"/>
+                      </a:schemeClr>
+                    </a:solidFill>
+                  </a:tcPr>
+                </a:tc>
+                <a:tc>
+                  <a:txBody>
+                    <a:bodyPr/>
+                    <a:lstStyle/>
+                    <a:p>
+                      <a:pPr>
+                        <a:buNone/>
+                      </a:pPr>
+                      <a:r>
+                        <a:rPr lang="en-US" sz="1800"/>
+                        <a:t>Remembers user preferences or conversation history</a:t>
+                      </a:r>
+                    </a:p>
+                  </a:txBody>
+                  <a:tcPr marL="72522" marR="72522" marT="36261" marB="36261" anchor="ctr">
+                    <a:lnL w="12700" cap="flat" cmpd="sng" algn="ctr">
+                      <a:solidFill>
+                        <a:schemeClr val="tx1"/>
+                      </a:solidFill>
+                      <a:prstDash val="solid"/>
+                      <a:round/>
+                      <a:headEnd type="none" w="med" len="med"/>
+                      <a:tailEnd type="none" w="med" len="med"/>
+                    </a:lnL>
+                    <a:lnR w="12700" cap="flat" cmpd="sng" algn="ctr">
+                      <a:solidFill>
+                        <a:schemeClr val="tx1"/>
+                      </a:solidFill>
+                      <a:prstDash val="solid"/>
+                      <a:round/>
+                      <a:headEnd type="none" w="med" len="med"/>
+                      <a:tailEnd type="none" w="med" len="med"/>
+                    </a:lnR>
+                    <a:lnT w="12700" cap="flat" cmpd="sng" algn="ctr">
+                      <a:solidFill>
+                        <a:schemeClr val="tx1"/>
+                      </a:solidFill>
+                      <a:prstDash val="solid"/>
+                      <a:round/>
+                      <a:headEnd type="none" w="med" len="med"/>
+                      <a:tailEnd type="none" w="med" len="med"/>
+                    </a:lnT>
+                    <a:lnB w="12700" cap="flat" cmpd="sng" algn="ctr">
+                      <a:solidFill>
+                        <a:schemeClr val="tx1"/>
+                      </a:solidFill>
+                      <a:prstDash val="solid"/>
+                      <a:round/>
+                      <a:headEnd type="none" w="med" len="med"/>
+                      <a:tailEnd type="none" w="med" len="med"/>
+                    </a:lnB>
+                    <a:solidFill>
+                      <a:schemeClr val="accent4">
+                        <a:lumMod val="40000"/>
+                        <a:lumOff val="60000"/>
+                      </a:schemeClr>
+                    </a:solidFill>
+                  </a:tcPr>
+                </a:tc>
+                <a:extLst>
+                  <a:ext uri="{0D108BD9-81ED-4DB2-BD59-A6C34878D82A}">
+                    <a16:rowId xmlns:a16="http://schemas.microsoft.com/office/drawing/2014/main" val="534986597"/>
+                  </a:ext>
+                </a:extLst>
+              </a:tr>
+              <a:tr h="507656">
+                <a:tc>
+                  <a:txBody>
+                    <a:bodyPr/>
+                    <a:lstStyle/>
+                    <a:p>
+                      <a:pPr>
+                        <a:buNone/>
+                      </a:pPr>
+                      <a:r>
+                        <a:rPr lang="en-GB" sz="1800" b="1"/>
+                        <a:t>ReAct</a:t>
+                      </a:r>
+                      <a:endParaRPr lang="en-GB" sz="1800"/>
+                    </a:p>
+                  </a:txBody>
+                  <a:tcPr marL="72522" marR="72522" marT="36261" marB="36261" anchor="ctr">
+                    <a:lnL w="12700" cap="flat" cmpd="sng" algn="ctr">
+                      <a:solidFill>
+                        <a:schemeClr val="tx1"/>
+                      </a:solidFill>
+                      <a:prstDash val="solid"/>
+                      <a:round/>
+                      <a:headEnd type="none" w="med" len="med"/>
+                      <a:tailEnd type="none" w="med" len="med"/>
+                    </a:lnL>
+                    <a:lnR w="12700" cap="flat" cmpd="sng" algn="ctr">
+                      <a:solidFill>
+                        <a:schemeClr val="tx1"/>
+                      </a:solidFill>
+                      <a:prstDash val="solid"/>
+                      <a:round/>
+                      <a:headEnd type="none" w="med" len="med"/>
+                      <a:tailEnd type="none" w="med" len="med"/>
+                    </a:lnR>
+                    <a:lnT w="12700" cap="flat" cmpd="sng" algn="ctr">
+                      <a:solidFill>
+                        <a:schemeClr val="tx1"/>
+                      </a:solidFill>
+                      <a:prstDash val="solid"/>
+                      <a:round/>
+                      <a:headEnd type="none" w="med" len="med"/>
+                      <a:tailEnd type="none" w="med" len="med"/>
+                    </a:lnT>
+                    <a:lnB w="12700" cap="flat" cmpd="sng" algn="ctr">
+                      <a:solidFill>
+                        <a:schemeClr val="tx1"/>
+                      </a:solidFill>
+                      <a:prstDash val="solid"/>
+                      <a:round/>
+                      <a:headEnd type="none" w="med" len="med"/>
+                      <a:tailEnd type="none" w="med" len="med"/>
+                    </a:lnB>
+                    <a:solidFill>
+                      <a:schemeClr val="accent4">
+                        <a:lumMod val="40000"/>
+                        <a:lumOff val="60000"/>
+                      </a:schemeClr>
+                    </a:solidFill>
+                  </a:tcPr>
+                </a:tc>
+                <a:tc>
+                  <a:txBody>
+                    <a:bodyPr/>
+                    <a:lstStyle/>
+                    <a:p>
+                      <a:pPr>
+                        <a:buNone/>
+                      </a:pPr>
+                      <a:r>
+                        <a:rPr lang="en-US" sz="1800"/>
+                        <a:t>Reasoning + Action pattern for agents</a:t>
+                      </a:r>
+                    </a:p>
+                  </a:txBody>
+                  <a:tcPr marL="72522" marR="72522" marT="36261" marB="36261" anchor="ctr">
+                    <a:lnL w="12700" cap="flat" cmpd="sng" algn="ctr">
+                      <a:solidFill>
+                        <a:schemeClr val="tx1"/>
+                      </a:solidFill>
+                      <a:prstDash val="solid"/>
+                      <a:round/>
+                      <a:headEnd type="none" w="med" len="med"/>
+                      <a:tailEnd type="none" w="med" len="med"/>
+                    </a:lnL>
+                    <a:lnR w="12700" cap="flat" cmpd="sng" algn="ctr">
+                      <a:solidFill>
+                        <a:schemeClr val="tx1"/>
+                      </a:solidFill>
+                      <a:prstDash val="solid"/>
+                      <a:round/>
+                      <a:headEnd type="none" w="med" len="med"/>
+                      <a:tailEnd type="none" w="med" len="med"/>
+                    </a:lnR>
+                    <a:lnT w="12700" cap="flat" cmpd="sng" algn="ctr">
+                      <a:solidFill>
+                        <a:schemeClr val="tx1"/>
+                      </a:solidFill>
+                      <a:prstDash val="solid"/>
+                      <a:round/>
+                      <a:headEnd type="none" w="med" len="med"/>
+                      <a:tailEnd type="none" w="med" len="med"/>
+                    </a:lnT>
+                    <a:lnB w="12700" cap="flat" cmpd="sng" algn="ctr">
+                      <a:solidFill>
+                        <a:schemeClr val="tx1"/>
+                      </a:solidFill>
+                      <a:prstDash val="solid"/>
+                      <a:round/>
+                      <a:headEnd type="none" w="med" len="med"/>
+                      <a:tailEnd type="none" w="med" len="med"/>
+                    </a:lnB>
+                    <a:solidFill>
+                      <a:schemeClr val="accent4">
+                        <a:lumMod val="40000"/>
+                        <a:lumOff val="60000"/>
+                      </a:schemeClr>
+                    </a:solidFill>
+                  </a:tcPr>
+                </a:tc>
+                <a:tc>
+                  <a:txBody>
+                    <a:bodyPr/>
+                    <a:lstStyle/>
+                    <a:p>
+                      <a:pPr>
+                        <a:buNone/>
+                      </a:pPr>
+                      <a:r>
+                        <a:rPr lang="en-US" sz="1800"/>
+                        <a:t>LLM decides whether to think or act</a:t>
+                      </a:r>
+                    </a:p>
+                  </a:txBody>
+                  <a:tcPr marL="72522" marR="72522" marT="36261" marB="36261" anchor="ctr">
+                    <a:lnL w="12700" cap="flat" cmpd="sng" algn="ctr">
+                      <a:solidFill>
+                        <a:schemeClr val="tx1"/>
+                      </a:solidFill>
+                      <a:prstDash val="solid"/>
+                      <a:round/>
+                      <a:headEnd type="none" w="med" len="med"/>
+                      <a:tailEnd type="none" w="med" len="med"/>
+                    </a:lnL>
+                    <a:lnR w="12700" cap="flat" cmpd="sng" algn="ctr">
+                      <a:solidFill>
+                        <a:schemeClr val="tx1"/>
+                      </a:solidFill>
+                      <a:prstDash val="solid"/>
+                      <a:round/>
+                      <a:headEnd type="none" w="med" len="med"/>
+                      <a:tailEnd type="none" w="med" len="med"/>
+                    </a:lnR>
+                    <a:lnT w="12700" cap="flat" cmpd="sng" algn="ctr">
+                      <a:solidFill>
+                        <a:schemeClr val="tx1"/>
+                      </a:solidFill>
+                      <a:prstDash val="solid"/>
+                      <a:round/>
+                      <a:headEnd type="none" w="med" len="med"/>
+                      <a:tailEnd type="none" w="med" len="med"/>
+                    </a:lnT>
+                    <a:lnB w="12700" cap="flat" cmpd="sng" algn="ctr">
+                      <a:solidFill>
+                        <a:schemeClr val="tx1"/>
+                      </a:solidFill>
+                      <a:prstDash val="solid"/>
+                      <a:round/>
+                      <a:headEnd type="none" w="med" len="med"/>
+                      <a:tailEnd type="none" w="med" len="med"/>
+                    </a:lnB>
+                    <a:solidFill>
+                      <a:schemeClr val="accent4">
+                        <a:lumMod val="40000"/>
+                        <a:lumOff val="60000"/>
+                      </a:schemeClr>
+                    </a:solidFill>
+                  </a:tcPr>
+                </a:tc>
+                <a:extLst>
+                  <a:ext uri="{0D108BD9-81ED-4DB2-BD59-A6C34878D82A}">
+                    <a16:rowId xmlns:a16="http://schemas.microsoft.com/office/drawing/2014/main" val="1420241193"/>
+                  </a:ext>
+                </a:extLst>
+              </a:tr>
+              <a:tr h="507656">
+                <a:tc>
+                  <a:txBody>
+                    <a:bodyPr/>
+                    <a:lstStyle/>
+                    <a:p>
+                      <a:pPr>
+                        <a:buNone/>
+                      </a:pPr>
+                      <a:r>
+                        <a:rPr lang="en-GB" sz="1800" b="1" dirty="0"/>
+                        <a:t>Schema / Messages</a:t>
+                      </a:r>
+                      <a:endParaRPr lang="en-GB" sz="1800" dirty="0"/>
+                    </a:p>
+                  </a:txBody>
+                  <a:tcPr marL="72522" marR="72522" marT="36261" marB="36261" anchor="ctr">
+                    <a:lnL w="12700" cap="flat" cmpd="sng" algn="ctr">
+                      <a:solidFill>
+                        <a:schemeClr val="tx1"/>
+                      </a:solidFill>
+                      <a:prstDash val="solid"/>
+                      <a:round/>
+                      <a:headEnd type="none" w="med" len="med"/>
+                      <a:tailEnd type="none" w="med" len="med"/>
+                    </a:lnL>
+                    <a:lnR w="12700" cap="flat" cmpd="sng" algn="ctr">
+                      <a:solidFill>
+                        <a:schemeClr val="tx1"/>
+                      </a:solidFill>
+                      <a:prstDash val="solid"/>
+                      <a:round/>
+                      <a:headEnd type="none" w="med" len="med"/>
+                      <a:tailEnd type="none" w="med" len="med"/>
+                    </a:lnR>
+                    <a:lnT w="12700" cap="flat" cmpd="sng" algn="ctr">
+                      <a:solidFill>
+                        <a:schemeClr val="tx1"/>
+                      </a:solidFill>
+                      <a:prstDash val="solid"/>
+                      <a:round/>
+                      <a:headEnd type="none" w="med" len="med"/>
+                      <a:tailEnd type="none" w="med" len="med"/>
+                    </a:lnT>
+                    <a:lnB w="12700" cap="flat" cmpd="sng" algn="ctr">
+                      <a:solidFill>
+                        <a:schemeClr val="tx1"/>
+                      </a:solidFill>
+                      <a:prstDash val="solid"/>
+                      <a:round/>
+                      <a:headEnd type="none" w="med" len="med"/>
+                      <a:tailEnd type="none" w="med" len="med"/>
+                    </a:lnB>
+                    <a:solidFill>
+                      <a:schemeClr val="accent4">
+                        <a:lumMod val="40000"/>
+                        <a:lumOff val="60000"/>
+                      </a:schemeClr>
+                    </a:solidFill>
+                  </a:tcPr>
+                </a:tc>
+                <a:tc>
+                  <a:txBody>
+                    <a:bodyPr/>
+                    <a:lstStyle/>
+                    <a:p>
+                      <a:pPr>
+                        <a:buNone/>
+                      </a:pPr>
+                      <a:r>
+                        <a:rPr lang="en-US" sz="1800"/>
+                        <a:t>Structured format for inputs/outputs</a:t>
+                      </a:r>
+                    </a:p>
+                  </a:txBody>
+                  <a:tcPr marL="72522" marR="72522" marT="36261" marB="36261" anchor="ctr">
+                    <a:lnL w="12700" cap="flat" cmpd="sng" algn="ctr">
+                      <a:solidFill>
+                        <a:schemeClr val="tx1"/>
+                      </a:solidFill>
+                      <a:prstDash val="solid"/>
+                      <a:round/>
+                      <a:headEnd type="none" w="med" len="med"/>
+                      <a:tailEnd type="none" w="med" len="med"/>
+                    </a:lnL>
+                    <a:lnR w="12700" cap="flat" cmpd="sng" algn="ctr">
+                      <a:solidFill>
+                        <a:schemeClr val="tx1"/>
+                      </a:solidFill>
+                      <a:prstDash val="solid"/>
+                      <a:round/>
+                      <a:headEnd type="none" w="med" len="med"/>
+                      <a:tailEnd type="none" w="med" len="med"/>
+                    </a:lnR>
+                    <a:lnT w="12700" cap="flat" cmpd="sng" algn="ctr">
+                      <a:solidFill>
+                        <a:schemeClr val="tx1"/>
+                      </a:solidFill>
+                      <a:prstDash val="solid"/>
+                      <a:round/>
+                      <a:headEnd type="none" w="med" len="med"/>
+                      <a:tailEnd type="none" w="med" len="med"/>
+                    </a:lnT>
+                    <a:lnB w="12700" cap="flat" cmpd="sng" algn="ctr">
+                      <a:solidFill>
+                        <a:schemeClr val="tx1"/>
+                      </a:solidFill>
+                      <a:prstDash val="solid"/>
+                      <a:round/>
+                      <a:headEnd type="none" w="med" len="med"/>
+                      <a:tailEnd type="none" w="med" len="med"/>
+                    </a:lnB>
+                    <a:solidFill>
+                      <a:schemeClr val="accent4">
+                        <a:lumMod val="40000"/>
+                        <a:lumOff val="60000"/>
+                      </a:schemeClr>
+                    </a:solidFill>
+                  </a:tcPr>
+                </a:tc>
+                <a:tc>
+                  <a:txBody>
+                    <a:bodyPr/>
+                    <a:lstStyle/>
+                    <a:p>
+                      <a:pPr>
+                        <a:buNone/>
+                      </a:pPr>
+                      <a:r>
+                        <a:rPr lang="en-GB" sz="1800" dirty="0" err="1">
+                          <a:latin typeface="Courier New" panose="02070309020205020404" pitchFamily="49" charset="0"/>
+                        </a:rPr>
+                        <a:t>HumanMessage</a:t>
+                      </a:r>
+                      <a:r>
+                        <a:rPr lang="en-GB" sz="1800" dirty="0"/>
+                        <a:t>, </a:t>
+                      </a:r>
+                      <a:r>
+                        <a:rPr lang="en-GB" sz="1800" dirty="0" err="1">
+                          <a:latin typeface="Courier New" panose="02070309020205020404" pitchFamily="49" charset="0"/>
+                        </a:rPr>
+                        <a:t>AIMessage</a:t>
+                      </a:r>
+                      <a:r>
+                        <a:rPr lang="en-GB" sz="1800" dirty="0"/>
+                        <a:t>, </a:t>
+                      </a:r>
+                      <a:r>
+                        <a:rPr lang="en-GB" sz="1800" dirty="0" err="1">
+                          <a:latin typeface="Courier New" panose="02070309020205020404" pitchFamily="49" charset="0"/>
+                        </a:rPr>
+                        <a:t>SystemMessage</a:t>
+                      </a:r>
+                      <a:endParaRPr lang="en-GB" sz="1800" dirty="0"/>
+                    </a:p>
+                  </a:txBody>
+                  <a:tcPr marL="72522" marR="72522" marT="36261" marB="36261" anchor="ctr">
+                    <a:lnL w="12700" cap="flat" cmpd="sng" algn="ctr">
+                      <a:solidFill>
+                        <a:schemeClr val="tx1"/>
+                      </a:solidFill>
+                      <a:prstDash val="solid"/>
+                      <a:round/>
+                      <a:headEnd type="none" w="med" len="med"/>
+                      <a:tailEnd type="none" w="med" len="med"/>
+                    </a:lnL>
+                    <a:lnR w="12700" cap="flat" cmpd="sng" algn="ctr">
+                      <a:solidFill>
+                        <a:schemeClr val="tx1"/>
+                      </a:solidFill>
+                      <a:prstDash val="solid"/>
+                      <a:round/>
+                      <a:headEnd type="none" w="med" len="med"/>
+                      <a:tailEnd type="none" w="med" len="med"/>
+                    </a:lnR>
+                    <a:lnT w="12700" cap="flat" cmpd="sng" algn="ctr">
+                      <a:solidFill>
+                        <a:schemeClr val="tx1"/>
+                      </a:solidFill>
+                      <a:prstDash val="solid"/>
+                      <a:round/>
+                      <a:headEnd type="none" w="med" len="med"/>
+                      <a:tailEnd type="none" w="med" len="med"/>
+                    </a:lnT>
+                    <a:lnB w="12700" cap="flat" cmpd="sng" algn="ctr">
+                      <a:solidFill>
+                        <a:schemeClr val="tx1"/>
+                      </a:solidFill>
+                      <a:prstDash val="solid"/>
+                      <a:round/>
+                      <a:headEnd type="none" w="med" len="med"/>
+                      <a:tailEnd type="none" w="med" len="med"/>
+                    </a:lnB>
+                    <a:solidFill>
+                      <a:schemeClr val="accent4">
+                        <a:lumMod val="40000"/>
+                        <a:lumOff val="60000"/>
+                      </a:schemeClr>
+                    </a:solidFill>
+                  </a:tcPr>
+                </a:tc>
+                <a:extLst>
+                  <a:ext uri="{0D108BD9-81ED-4DB2-BD59-A6C34878D82A}">
+                    <a16:rowId xmlns:a16="http://schemas.microsoft.com/office/drawing/2014/main" val="2272377385"/>
+                  </a:ext>
+                </a:extLst>
+              </a:tr>
+            </a:tbl>
+          </a:graphicData>
+        </a:graphic>
+      </p:graphicFrame>
+    </p:spTree>
+    <p:extLst>
+      <p:ext uri="{BB962C8B-B14F-4D97-AF65-F5344CB8AC3E}">
+        <p14:creationId xmlns:p14="http://schemas.microsoft.com/office/powerpoint/2010/main" val="1501626702"/>
+      </p:ext>
+    </p:extLst>
+  </p:cSld>
+  <p:clrMapOvr>
+    <a:masterClrMapping/>
+  </p:clrMapOvr>
+</p:sld>
+</file>
+
+<file path=ppt/slides/slide43.xml><?xml version="1.0" encoding="utf-8"?>
+<p:sld xmlns:a="http://schemas.openxmlformats.org/drawingml/2006/main" xmlns:r="http://schemas.openxmlformats.org/officeDocument/2006/relationships" xmlns:p="http://schemas.openxmlformats.org/presentationml/2006/main">
+  <p:cSld>
+    <p:spTree>
+      <p:nvGrpSpPr>
+        <p:cNvPr id="1" name=""/>
+        <p:cNvGrpSpPr/>
+        <p:nvPr/>
+      </p:nvGrpSpPr>
+      <p:grpSpPr>
+        <a:xfrm>
+          <a:off x="0" y="0"/>
+          <a:ext cx="0" cy="0"/>
+          <a:chOff x="0" y="0"/>
+          <a:chExt cx="0" cy="0"/>
+        </a:xfrm>
+      </p:grpSpPr>
+      <p:sp>
+        <p:nvSpPr>
+          <p:cNvPr id="2" name="Title 1">
+            <a:extLst>
+              <a:ext uri="{FF2B5EF4-FFF2-40B4-BE49-F238E27FC236}">
+                <a16:creationId xmlns:a16="http://schemas.microsoft.com/office/drawing/2014/main" id="{46FE6E08-2CDF-C0E7-D294-C3BC0F134F1C}"/>
+              </a:ext>
+            </a:extLst>
+          </p:cNvPr>
+          <p:cNvSpPr>
+            <a:spLocks noGrp="1"/>
+          </p:cNvSpPr>
+          <p:nvPr>
+            <p:ph type="title"/>
+          </p:nvPr>
+        </p:nvSpPr>
+        <p:spPr/>
+        <p:txBody>
+          <a:bodyPr>
+            <a:normAutofit fontScale="90000"/>
+          </a:bodyPr>
+          <a:lstStyle/>
+          <a:p>
+            <a:r>
+              <a:rPr lang="en-IN" dirty="0"/>
+              <a:t>Code Examples (</a:t>
+            </a:r>
+            <a:r>
+              <a:rPr lang="it-IT" dirty="0"/>
+              <a:t>C:\code\agenticai\9_general\langchain_basics)</a:t>
+            </a:r>
+            <a:endParaRPr lang="en-GB" dirty="0"/>
+          </a:p>
+        </p:txBody>
+      </p:sp>
+      <p:graphicFrame>
+        <p:nvGraphicFramePr>
+          <p:cNvPr id="4" name="Content Placeholder 3">
+            <a:extLst>
+              <a:ext uri="{FF2B5EF4-FFF2-40B4-BE49-F238E27FC236}">
+                <a16:creationId xmlns:a16="http://schemas.microsoft.com/office/drawing/2014/main" id="{9DC9F71F-8066-6C3E-A1D7-5F03BA1AEC8A}"/>
+              </a:ext>
+            </a:extLst>
+          </p:cNvPr>
+          <p:cNvGraphicFramePr>
+            <a:graphicFrameLocks noGrp="1"/>
+          </p:cNvGraphicFramePr>
+          <p:nvPr>
+            <p:ph idx="1"/>
+          </p:nvPr>
+        </p:nvGraphicFramePr>
+        <p:xfrm>
+          <a:off x="838200" y="1825625"/>
+          <a:ext cx="10515597" cy="1483360"/>
+        </p:xfrm>
+        <a:graphic>
+          <a:graphicData uri="http://schemas.openxmlformats.org/drawingml/2006/table">
+            <a:tbl>
+              <a:tblPr firstRow="1" bandRow="1">
+                <a:tableStyleId>{72833802-FEF1-4C79-8D5D-14CF1EAF98D9}</a:tableStyleId>
+              </a:tblPr>
+              <a:tblGrid>
+                <a:gridCol w="983620">
+                  <a:extLst>
+                    <a:ext uri="{9D8B030D-6E8A-4147-A177-3AD203B41FA5}">
+                      <a16:colId xmlns:a16="http://schemas.microsoft.com/office/drawing/2014/main" val="1050913285"/>
+                    </a:ext>
+                  </a:extLst>
+                </a:gridCol>
+                <a:gridCol w="4648782">
+                  <a:extLst>
+                    <a:ext uri="{9D8B030D-6E8A-4147-A177-3AD203B41FA5}">
+                      <a16:colId xmlns:a16="http://schemas.microsoft.com/office/drawing/2014/main" val="1840395850"/>
+                    </a:ext>
+                  </a:extLst>
+                </a:gridCol>
+                <a:gridCol w="4883195">
+                  <a:extLst>
+                    <a:ext uri="{9D8B030D-6E8A-4147-A177-3AD203B41FA5}">
+                      <a16:colId xmlns:a16="http://schemas.microsoft.com/office/drawing/2014/main" val="1767616194"/>
+                    </a:ext>
+                  </a:extLst>
+                </a:gridCol>
+              </a:tblGrid>
+              <a:tr h="370840">
+                <a:tc>
+                  <a:txBody>
+                    <a:bodyPr/>
+                    <a:lstStyle/>
+                    <a:p>
+                      <a:r>
+                        <a:rPr lang="en-IN" dirty="0"/>
+                        <a:t>Sr No</a:t>
+                      </a:r>
+                      <a:endParaRPr lang="en-GB" dirty="0"/>
+                    </a:p>
+                  </a:txBody>
+                  <a:tcPr>
+                    <a:lnL w="12700" cap="flat" cmpd="sng" algn="ctr">
+                      <a:solidFill>
+                        <a:schemeClr val="tx1"/>
+                      </a:solidFill>
+                      <a:prstDash val="solid"/>
+                      <a:round/>
+                      <a:headEnd type="none" w="med" len="med"/>
+                      <a:tailEnd type="none" w="med" len="med"/>
+                    </a:lnL>
+                    <a:lnR w="12700" cap="flat" cmpd="sng" algn="ctr">
+                      <a:solidFill>
+                        <a:schemeClr val="tx1"/>
+                      </a:solidFill>
+                      <a:prstDash val="solid"/>
+                      <a:round/>
+                      <a:headEnd type="none" w="med" len="med"/>
+                      <a:tailEnd type="none" w="med" len="med"/>
+                    </a:lnR>
+                    <a:lnT w="12700" cap="flat" cmpd="sng" algn="ctr">
+                      <a:solidFill>
+                        <a:schemeClr val="tx1"/>
+                      </a:solidFill>
+                      <a:prstDash val="solid"/>
+                      <a:round/>
+                      <a:headEnd type="none" w="med" len="med"/>
+                      <a:tailEnd type="none" w="med" len="med"/>
+                    </a:lnT>
+                    <a:lnB w="12700" cap="flat" cmpd="sng" algn="ctr">
+                      <a:solidFill>
+                        <a:schemeClr val="tx1"/>
+                      </a:solidFill>
+                      <a:prstDash val="solid"/>
+                      <a:round/>
+                      <a:headEnd type="none" w="med" len="med"/>
+                      <a:tailEnd type="none" w="med" len="med"/>
+                    </a:lnB>
+                  </a:tcPr>
+                </a:tc>
+                <a:tc>
+                  <a:txBody>
+                    <a:bodyPr/>
+                    <a:lstStyle/>
+                    <a:p>
+                      <a:r>
+                        <a:rPr lang="en-IN" dirty="0"/>
+                        <a:t>File</a:t>
+                      </a:r>
+                      <a:endParaRPr lang="en-GB" dirty="0"/>
+                    </a:p>
+                  </a:txBody>
+                  <a:tcPr>
+                    <a:lnL w="12700" cap="flat" cmpd="sng" algn="ctr">
+                      <a:solidFill>
+                        <a:schemeClr val="tx1"/>
+                      </a:solidFill>
+                      <a:prstDash val="solid"/>
+                      <a:round/>
+                      <a:headEnd type="none" w="med" len="med"/>
+                      <a:tailEnd type="none" w="med" len="med"/>
+                    </a:lnL>
+                    <a:lnR w="12700" cap="flat" cmpd="sng" algn="ctr">
+                      <a:solidFill>
+                        <a:schemeClr val="tx1"/>
+                      </a:solidFill>
+                      <a:prstDash val="solid"/>
+                      <a:round/>
+                      <a:headEnd type="none" w="med" len="med"/>
+                      <a:tailEnd type="none" w="med" len="med"/>
+                    </a:lnR>
+                    <a:lnT w="12700" cap="flat" cmpd="sng" algn="ctr">
+                      <a:solidFill>
+                        <a:schemeClr val="tx1"/>
+                      </a:solidFill>
+                      <a:prstDash val="solid"/>
+                      <a:round/>
+                      <a:headEnd type="none" w="med" len="med"/>
+                      <a:tailEnd type="none" w="med" len="med"/>
+                    </a:lnT>
+                    <a:lnB w="12700" cap="flat" cmpd="sng" algn="ctr">
+                      <a:solidFill>
+                        <a:schemeClr val="tx1"/>
+                      </a:solidFill>
+                      <a:prstDash val="solid"/>
+                      <a:round/>
+                      <a:headEnd type="none" w="med" len="med"/>
+                      <a:tailEnd type="none" w="med" len="med"/>
+                    </a:lnB>
+                  </a:tcPr>
+                </a:tc>
+                <a:tc>
+                  <a:txBody>
+                    <a:bodyPr/>
+                    <a:lstStyle/>
+                    <a:p>
+                      <a:r>
+                        <a:rPr lang="en-IN" dirty="0"/>
+                        <a:t>Purpose</a:t>
+                      </a:r>
+                      <a:endParaRPr lang="en-GB" dirty="0"/>
+                    </a:p>
+                  </a:txBody>
+                  <a:tcPr>
+                    <a:lnL w="12700" cap="flat" cmpd="sng" algn="ctr">
+                      <a:solidFill>
+                        <a:schemeClr val="tx1"/>
+                      </a:solidFill>
+                      <a:prstDash val="solid"/>
+                      <a:round/>
+                      <a:headEnd type="none" w="med" len="med"/>
+                      <a:tailEnd type="none" w="med" len="med"/>
+                    </a:lnL>
+                    <a:lnR w="12700" cap="flat" cmpd="sng" algn="ctr">
+                      <a:solidFill>
+                        <a:schemeClr val="tx1"/>
+                      </a:solidFill>
+                      <a:prstDash val="solid"/>
+                      <a:round/>
+                      <a:headEnd type="none" w="med" len="med"/>
+                      <a:tailEnd type="none" w="med" len="med"/>
+                    </a:lnR>
+                    <a:lnT w="12700" cap="flat" cmpd="sng" algn="ctr">
+                      <a:solidFill>
+                        <a:schemeClr val="tx1"/>
+                      </a:solidFill>
+                      <a:prstDash val="solid"/>
+                      <a:round/>
+                      <a:headEnd type="none" w="med" len="med"/>
+                      <a:tailEnd type="none" w="med" len="med"/>
+                    </a:lnT>
+                    <a:lnB w="12700" cap="flat" cmpd="sng" algn="ctr">
+                      <a:solidFill>
+                        <a:schemeClr val="tx1"/>
+                      </a:solidFill>
+                      <a:prstDash val="solid"/>
+                      <a:round/>
+                      <a:headEnd type="none" w="med" len="med"/>
+                      <a:tailEnd type="none" w="med" len="med"/>
+                    </a:lnB>
+                  </a:tcPr>
+                </a:tc>
+                <a:extLst>
+                  <a:ext uri="{0D108BD9-81ED-4DB2-BD59-A6C34878D82A}">
+                    <a16:rowId xmlns:a16="http://schemas.microsoft.com/office/drawing/2014/main" val="4031901816"/>
+                  </a:ext>
+                </a:extLst>
+              </a:tr>
+              <a:tr h="370840">
+                <a:tc>
+                  <a:txBody>
+                    <a:bodyPr/>
+                    <a:lstStyle/>
+                    <a:p>
+                      <a:r>
+                        <a:rPr lang="en-IN" dirty="0"/>
+                        <a:t>1</a:t>
+                      </a:r>
+                      <a:endParaRPr lang="en-GB" dirty="0"/>
+                    </a:p>
+                  </a:txBody>
+                  <a:tcPr>
+                    <a:lnL w="12700" cap="flat" cmpd="sng" algn="ctr">
+                      <a:solidFill>
+                        <a:schemeClr val="tx1"/>
+                      </a:solidFill>
+                      <a:prstDash val="solid"/>
+                      <a:round/>
+                      <a:headEnd type="none" w="med" len="med"/>
+                      <a:tailEnd type="none" w="med" len="med"/>
+                    </a:lnL>
+                    <a:lnR w="12700" cap="flat" cmpd="sng" algn="ctr">
+                      <a:solidFill>
+                        <a:schemeClr val="tx1"/>
+                      </a:solidFill>
+                      <a:prstDash val="solid"/>
+                      <a:round/>
+                      <a:headEnd type="none" w="med" len="med"/>
+                      <a:tailEnd type="none" w="med" len="med"/>
+                    </a:lnR>
+                    <a:lnT w="12700" cap="flat" cmpd="sng" algn="ctr">
+                      <a:solidFill>
+                        <a:schemeClr val="tx1"/>
+                      </a:solidFill>
+                      <a:prstDash val="solid"/>
+                      <a:round/>
+                      <a:headEnd type="none" w="med" len="med"/>
+                      <a:tailEnd type="none" w="med" len="med"/>
+                    </a:lnT>
+                    <a:lnB w="12700" cap="flat" cmpd="sng" algn="ctr">
+                      <a:solidFill>
+                        <a:schemeClr val="tx1"/>
+                      </a:solidFill>
+                      <a:prstDash val="solid"/>
+                      <a:round/>
+                      <a:headEnd type="none" w="med" len="med"/>
+                      <a:tailEnd type="none" w="med" len="med"/>
+                    </a:lnB>
+                  </a:tcPr>
+                </a:tc>
+                <a:tc>
+                  <a:txBody>
+                    <a:bodyPr/>
+                    <a:lstStyle/>
+                    <a:p>
+                      <a:r>
+                        <a:rPr lang="en-GB" dirty="0"/>
+                        <a:t>langchain_1_calculator_ollama.py</a:t>
+                      </a:r>
+                    </a:p>
+                  </a:txBody>
+                  <a:tcPr>
+                    <a:lnL w="12700" cap="flat" cmpd="sng" algn="ctr">
+                      <a:solidFill>
+                        <a:schemeClr val="tx1"/>
+                      </a:solidFill>
+                      <a:prstDash val="solid"/>
+                      <a:round/>
+                      <a:headEnd type="none" w="med" len="med"/>
+                      <a:tailEnd type="none" w="med" len="med"/>
+                    </a:lnL>
+                    <a:lnR w="12700" cap="flat" cmpd="sng" algn="ctr">
+                      <a:solidFill>
+                        <a:schemeClr val="tx1"/>
+                      </a:solidFill>
+                      <a:prstDash val="solid"/>
+                      <a:round/>
+                      <a:headEnd type="none" w="med" len="med"/>
+                      <a:tailEnd type="none" w="med" len="med"/>
+                    </a:lnR>
+                    <a:lnT w="12700" cap="flat" cmpd="sng" algn="ctr">
+                      <a:solidFill>
+                        <a:schemeClr val="tx1"/>
+                      </a:solidFill>
+                      <a:prstDash val="solid"/>
+                      <a:round/>
+                      <a:headEnd type="none" w="med" len="med"/>
+                      <a:tailEnd type="none" w="med" len="med"/>
+                    </a:lnT>
+                    <a:lnB w="12700" cap="flat" cmpd="sng" algn="ctr">
+                      <a:solidFill>
+                        <a:schemeClr val="tx1"/>
+                      </a:solidFill>
+                      <a:prstDash val="solid"/>
+                      <a:round/>
+                      <a:headEnd type="none" w="med" len="med"/>
+                      <a:tailEnd type="none" w="med" len="med"/>
+                    </a:lnB>
+                  </a:tcPr>
+                </a:tc>
+                <a:tc>
+                  <a:txBody>
+                    <a:bodyPr/>
+                    <a:lstStyle/>
+                    <a:p>
+                      <a:r>
+                        <a:rPr lang="en-IN" dirty="0"/>
+                        <a:t>Basic calculator using Ollama</a:t>
+                      </a:r>
+                      <a:endParaRPr lang="en-GB" dirty="0"/>
+                    </a:p>
+                  </a:txBody>
+                  <a:tcPr>
+                    <a:lnL w="12700" cap="flat" cmpd="sng" algn="ctr">
+                      <a:solidFill>
+                        <a:schemeClr val="tx1"/>
+                      </a:solidFill>
+                      <a:prstDash val="solid"/>
+                      <a:round/>
+                      <a:headEnd type="none" w="med" len="med"/>
+                      <a:tailEnd type="none" w="med" len="med"/>
+                    </a:lnL>
+                    <a:lnR w="12700" cap="flat" cmpd="sng" algn="ctr">
+                      <a:solidFill>
+                        <a:schemeClr val="tx1"/>
+                      </a:solidFill>
+                      <a:prstDash val="solid"/>
+                      <a:round/>
+                      <a:headEnd type="none" w="med" len="med"/>
+                      <a:tailEnd type="none" w="med" len="med"/>
+                    </a:lnR>
+                    <a:lnT w="12700" cap="flat" cmpd="sng" algn="ctr">
+                      <a:solidFill>
+                        <a:schemeClr val="tx1"/>
+                      </a:solidFill>
+                      <a:prstDash val="solid"/>
+                      <a:round/>
+                      <a:headEnd type="none" w="med" len="med"/>
+                      <a:tailEnd type="none" w="med" len="med"/>
+                    </a:lnT>
+                    <a:lnB w="12700" cap="flat" cmpd="sng" algn="ctr">
+                      <a:solidFill>
+                        <a:schemeClr val="tx1"/>
+                      </a:solidFill>
+                      <a:prstDash val="solid"/>
+                      <a:round/>
+                      <a:headEnd type="none" w="med" len="med"/>
+                      <a:tailEnd type="none" w="med" len="med"/>
+                    </a:lnB>
+                  </a:tcPr>
+                </a:tc>
+                <a:extLst>
+                  <a:ext uri="{0D108BD9-81ED-4DB2-BD59-A6C34878D82A}">
+                    <a16:rowId xmlns:a16="http://schemas.microsoft.com/office/drawing/2014/main" val="3550129446"/>
+                  </a:ext>
+                </a:extLst>
+              </a:tr>
+              <a:tr h="370840">
+                <a:tc>
+                  <a:txBody>
+                    <a:bodyPr/>
+                    <a:lstStyle/>
+                    <a:p>
+                      <a:r>
+                        <a:rPr lang="en-IN" dirty="0"/>
+                        <a:t>2</a:t>
+                      </a:r>
+                      <a:endParaRPr lang="en-GB" dirty="0"/>
+                    </a:p>
+                  </a:txBody>
+                  <a:tcPr>
+                    <a:lnL w="12700" cap="flat" cmpd="sng" algn="ctr">
+                      <a:solidFill>
+                        <a:schemeClr val="tx1"/>
+                      </a:solidFill>
+                      <a:prstDash val="solid"/>
+                      <a:round/>
+                      <a:headEnd type="none" w="med" len="med"/>
+                      <a:tailEnd type="none" w="med" len="med"/>
+                    </a:lnL>
+                    <a:lnR w="12700" cap="flat" cmpd="sng" algn="ctr">
+                      <a:solidFill>
+                        <a:schemeClr val="tx1"/>
+                      </a:solidFill>
+                      <a:prstDash val="solid"/>
+                      <a:round/>
+                      <a:headEnd type="none" w="med" len="med"/>
+                      <a:tailEnd type="none" w="med" len="med"/>
+                    </a:lnR>
+                    <a:lnT w="12700" cap="flat" cmpd="sng" algn="ctr">
+                      <a:solidFill>
+                        <a:schemeClr val="tx1"/>
+                      </a:solidFill>
+                      <a:prstDash val="solid"/>
+                      <a:round/>
+                      <a:headEnd type="none" w="med" len="med"/>
+                      <a:tailEnd type="none" w="med" len="med"/>
+                    </a:lnT>
+                    <a:lnB w="12700" cap="flat" cmpd="sng" algn="ctr">
+                      <a:solidFill>
+                        <a:schemeClr val="tx1"/>
+                      </a:solidFill>
+                      <a:prstDash val="solid"/>
+                      <a:round/>
+                      <a:headEnd type="none" w="med" len="med"/>
+                      <a:tailEnd type="none" w="med" len="med"/>
+                    </a:lnB>
+                  </a:tcPr>
+                </a:tc>
+                <a:tc>
+                  <a:txBody>
+                    <a:bodyPr/>
+                    <a:lstStyle/>
+                    <a:p>
+                      <a:pPr marL="0" marR="0" lvl="0" indent="0" algn="l" defTabSz="914400" rtl="0" eaLnBrk="1" fontAlgn="auto" latinLnBrk="0" hangingPunct="1">
+                        <a:lnSpc>
+                          <a:spcPct val="100000"/>
+                        </a:lnSpc>
+                        <a:spcBef>
+                          <a:spcPts val="0"/>
+                        </a:spcBef>
+                        <a:spcAft>
+                          <a:spcPts val="0"/>
+                        </a:spcAft>
+                        <a:buClrTx/>
+                        <a:buSzTx/>
+                        <a:buFontTx/>
+                        <a:buNone/>
+                        <a:tabLst/>
+                        <a:defRPr/>
+                      </a:pPr>
+                      <a:r>
+                        <a:rPr lang="en-GB" dirty="0"/>
+                        <a:t>langchain_1_calculator_openai.py</a:t>
+                      </a:r>
+                    </a:p>
+                  </a:txBody>
+                  <a:tcPr>
+                    <a:lnL w="12700" cap="flat" cmpd="sng" algn="ctr">
+                      <a:solidFill>
+                        <a:schemeClr val="tx1"/>
+                      </a:solidFill>
+                      <a:prstDash val="solid"/>
+                      <a:round/>
+                      <a:headEnd type="none" w="med" len="med"/>
+                      <a:tailEnd type="none" w="med" len="med"/>
+                    </a:lnL>
+                    <a:lnR w="12700" cap="flat" cmpd="sng" algn="ctr">
+                      <a:solidFill>
+                        <a:schemeClr val="tx1"/>
+                      </a:solidFill>
+                      <a:prstDash val="solid"/>
+                      <a:round/>
+                      <a:headEnd type="none" w="med" len="med"/>
+                      <a:tailEnd type="none" w="med" len="med"/>
+                    </a:lnR>
+                    <a:lnT w="12700" cap="flat" cmpd="sng" algn="ctr">
+                      <a:solidFill>
+                        <a:schemeClr val="tx1"/>
+                      </a:solidFill>
+                      <a:prstDash val="solid"/>
+                      <a:round/>
+                      <a:headEnd type="none" w="med" len="med"/>
+                      <a:tailEnd type="none" w="med" len="med"/>
+                    </a:lnT>
+                    <a:lnB w="12700" cap="flat" cmpd="sng" algn="ctr">
+                      <a:solidFill>
+                        <a:schemeClr val="tx1"/>
+                      </a:solidFill>
+                      <a:prstDash val="solid"/>
+                      <a:round/>
+                      <a:headEnd type="none" w="med" len="med"/>
+                      <a:tailEnd type="none" w="med" len="med"/>
+                    </a:lnB>
+                  </a:tcPr>
+                </a:tc>
+                <a:tc>
+                  <a:txBody>
+                    <a:bodyPr/>
+                    <a:lstStyle/>
+                    <a:p>
+                      <a:r>
+                        <a:rPr lang="en-IN" dirty="0"/>
+                        <a:t>Same example using OpenAI</a:t>
+                      </a:r>
+                      <a:endParaRPr lang="en-GB" dirty="0"/>
+                    </a:p>
+                  </a:txBody>
+                  <a:tcPr>
+                    <a:lnL w="12700" cap="flat" cmpd="sng" algn="ctr">
+                      <a:solidFill>
+                        <a:schemeClr val="tx1"/>
+                      </a:solidFill>
+                      <a:prstDash val="solid"/>
+                      <a:round/>
+                      <a:headEnd type="none" w="med" len="med"/>
+                      <a:tailEnd type="none" w="med" len="med"/>
+                    </a:lnL>
+                    <a:lnR w="12700" cap="flat" cmpd="sng" algn="ctr">
+                      <a:solidFill>
+                        <a:schemeClr val="tx1"/>
+                      </a:solidFill>
+                      <a:prstDash val="solid"/>
+                      <a:round/>
+                      <a:headEnd type="none" w="med" len="med"/>
+                      <a:tailEnd type="none" w="med" len="med"/>
+                    </a:lnR>
+                    <a:lnT w="12700" cap="flat" cmpd="sng" algn="ctr">
+                      <a:solidFill>
+                        <a:schemeClr val="tx1"/>
+                      </a:solidFill>
+                      <a:prstDash val="solid"/>
+                      <a:round/>
+                      <a:headEnd type="none" w="med" len="med"/>
+                      <a:tailEnd type="none" w="med" len="med"/>
+                    </a:lnT>
+                    <a:lnB w="12700" cap="flat" cmpd="sng" algn="ctr">
+                      <a:solidFill>
+                        <a:schemeClr val="tx1"/>
+                      </a:solidFill>
+                      <a:prstDash val="solid"/>
+                      <a:round/>
+                      <a:headEnd type="none" w="med" len="med"/>
+                      <a:tailEnd type="none" w="med" len="med"/>
+                    </a:lnB>
+                  </a:tcPr>
+                </a:tc>
+                <a:extLst>
+                  <a:ext uri="{0D108BD9-81ED-4DB2-BD59-A6C34878D82A}">
+                    <a16:rowId xmlns:a16="http://schemas.microsoft.com/office/drawing/2014/main" val="3465696953"/>
+                  </a:ext>
+                </a:extLst>
+              </a:tr>
+              <a:tr h="370840">
+                <a:tc>
+                  <a:txBody>
+                    <a:bodyPr/>
+                    <a:lstStyle/>
+                    <a:p>
+                      <a:r>
+                        <a:rPr lang="en-IN" dirty="0"/>
+                        <a:t>3</a:t>
+                      </a:r>
+                      <a:endParaRPr lang="en-GB" dirty="0"/>
+                    </a:p>
+                  </a:txBody>
+                  <a:tcPr>
+                    <a:lnL w="12700" cap="flat" cmpd="sng" algn="ctr">
+                      <a:solidFill>
+                        <a:schemeClr val="tx1"/>
+                      </a:solidFill>
+                      <a:prstDash val="solid"/>
+                      <a:round/>
+                      <a:headEnd type="none" w="med" len="med"/>
+                      <a:tailEnd type="none" w="med" len="med"/>
+                    </a:lnL>
+                    <a:lnR w="12700" cap="flat" cmpd="sng" algn="ctr">
+                      <a:solidFill>
+                        <a:schemeClr val="tx1"/>
+                      </a:solidFill>
+                      <a:prstDash val="solid"/>
+                      <a:round/>
+                      <a:headEnd type="none" w="med" len="med"/>
+                      <a:tailEnd type="none" w="med" len="med"/>
+                    </a:lnR>
+                    <a:lnT w="12700" cap="flat" cmpd="sng" algn="ctr">
+                      <a:solidFill>
+                        <a:schemeClr val="tx1"/>
+                      </a:solidFill>
+                      <a:prstDash val="solid"/>
+                      <a:round/>
+                      <a:headEnd type="none" w="med" len="med"/>
+                      <a:tailEnd type="none" w="med" len="med"/>
+                    </a:lnT>
+                    <a:lnB w="12700" cap="flat" cmpd="sng" algn="ctr">
+                      <a:solidFill>
+                        <a:schemeClr val="tx1"/>
+                      </a:solidFill>
+                      <a:prstDash val="solid"/>
+                      <a:round/>
+                      <a:headEnd type="none" w="med" len="med"/>
+                      <a:tailEnd type="none" w="med" len="med"/>
+                    </a:lnB>
+                  </a:tcPr>
+                </a:tc>
+                <a:tc>
+                  <a:txBody>
+                    <a:bodyPr/>
+                    <a:lstStyle/>
+                    <a:p>
+                      <a:pPr marL="0" marR="0" lvl="0" indent="0" algn="l" defTabSz="914400" rtl="0" eaLnBrk="1" fontAlgn="auto" latinLnBrk="0" hangingPunct="1">
+                        <a:lnSpc>
+                          <a:spcPct val="100000"/>
+                        </a:lnSpc>
+                        <a:spcBef>
+                          <a:spcPts val="0"/>
+                        </a:spcBef>
+                        <a:spcAft>
+                          <a:spcPts val="0"/>
+                        </a:spcAft>
+                        <a:buClrTx/>
+                        <a:buSzTx/>
+                        <a:buFontTx/>
+                        <a:buNone/>
+                        <a:tabLst/>
+                        <a:defRPr/>
+                      </a:pPr>
+                      <a:r>
+                        <a:rPr lang="en-US" dirty="0"/>
+                        <a:t>langchain_2_tavily_search_tool.py</a:t>
+                      </a:r>
+                      <a:endParaRPr lang="en-GB" dirty="0"/>
+                    </a:p>
+                  </a:txBody>
+                  <a:tcPr>
+                    <a:lnL w="12700" cap="flat" cmpd="sng" algn="ctr">
+                      <a:solidFill>
+                        <a:schemeClr val="tx1"/>
+                      </a:solidFill>
+                      <a:prstDash val="solid"/>
+                      <a:round/>
+                      <a:headEnd type="none" w="med" len="med"/>
+                      <a:tailEnd type="none" w="med" len="med"/>
+                    </a:lnL>
+                    <a:lnR w="12700" cap="flat" cmpd="sng" algn="ctr">
+                      <a:solidFill>
+                        <a:schemeClr val="tx1"/>
+                      </a:solidFill>
+                      <a:prstDash val="solid"/>
+                      <a:round/>
+                      <a:headEnd type="none" w="med" len="med"/>
+                      <a:tailEnd type="none" w="med" len="med"/>
+                    </a:lnR>
+                    <a:lnT w="12700" cap="flat" cmpd="sng" algn="ctr">
+                      <a:solidFill>
+                        <a:schemeClr val="tx1"/>
+                      </a:solidFill>
+                      <a:prstDash val="solid"/>
+                      <a:round/>
+                      <a:headEnd type="none" w="med" len="med"/>
+                      <a:tailEnd type="none" w="med" len="med"/>
+                    </a:lnT>
+                    <a:lnB w="12700" cap="flat" cmpd="sng" algn="ctr">
+                      <a:solidFill>
+                        <a:schemeClr val="tx1"/>
+                      </a:solidFill>
+                      <a:prstDash val="solid"/>
+                      <a:round/>
+                      <a:headEnd type="none" w="med" len="med"/>
+                      <a:tailEnd type="none" w="med" len="med"/>
+                    </a:lnB>
+                  </a:tcPr>
+                </a:tc>
+                <a:tc>
+                  <a:txBody>
+                    <a:bodyPr/>
+                    <a:lstStyle/>
+                    <a:p>
+                      <a:r>
+                        <a:rPr lang="en-IN" dirty="0"/>
+                        <a:t>Using Agent primitive, Tool (</a:t>
+                      </a:r>
+                      <a:r>
+                        <a:rPr lang="en-IN" dirty="0" err="1"/>
+                        <a:t>Tavily</a:t>
+                      </a:r>
+                      <a:r>
+                        <a:rPr lang="en-IN" dirty="0"/>
+                        <a:t> search)</a:t>
+                      </a:r>
+                      <a:endParaRPr lang="en-GB" dirty="0"/>
+                    </a:p>
+                  </a:txBody>
+                  <a:tcPr>
+                    <a:lnL w="12700" cap="flat" cmpd="sng" algn="ctr">
+                      <a:solidFill>
+                        <a:schemeClr val="tx1"/>
+                      </a:solidFill>
+                      <a:prstDash val="solid"/>
+                      <a:round/>
+                      <a:headEnd type="none" w="med" len="med"/>
+                      <a:tailEnd type="none" w="med" len="med"/>
+                    </a:lnL>
+                    <a:lnR w="12700" cap="flat" cmpd="sng" algn="ctr">
+                      <a:solidFill>
+                        <a:schemeClr val="tx1"/>
+                      </a:solidFill>
+                      <a:prstDash val="solid"/>
+                      <a:round/>
+                      <a:headEnd type="none" w="med" len="med"/>
+                      <a:tailEnd type="none" w="med" len="med"/>
+                    </a:lnR>
+                    <a:lnT w="12700" cap="flat" cmpd="sng" algn="ctr">
+                      <a:solidFill>
+                        <a:schemeClr val="tx1"/>
+                      </a:solidFill>
+                      <a:prstDash val="solid"/>
+                      <a:round/>
+                      <a:headEnd type="none" w="med" len="med"/>
+                      <a:tailEnd type="none" w="med" len="med"/>
+                    </a:lnT>
+                    <a:lnB w="12700" cap="flat" cmpd="sng" algn="ctr">
+                      <a:solidFill>
+                        <a:schemeClr val="tx1"/>
+                      </a:solidFill>
+                      <a:prstDash val="solid"/>
+                      <a:round/>
+                      <a:headEnd type="none" w="med" len="med"/>
+                      <a:tailEnd type="none" w="med" len="med"/>
+                    </a:lnB>
+                  </a:tcPr>
+                </a:tc>
+                <a:extLst>
+                  <a:ext uri="{0D108BD9-81ED-4DB2-BD59-A6C34878D82A}">
+                    <a16:rowId xmlns:a16="http://schemas.microsoft.com/office/drawing/2014/main" val="2170792430"/>
+                  </a:ext>
+                </a:extLst>
+              </a:tr>
+            </a:tbl>
+          </a:graphicData>
+        </a:graphic>
+      </p:graphicFrame>
+    </p:spTree>
+    <p:extLst>
+      <p:ext uri="{BB962C8B-B14F-4D97-AF65-F5344CB8AC3E}">
+        <p14:creationId xmlns:p14="http://schemas.microsoft.com/office/powerpoint/2010/main" val="441768695"/>
+      </p:ext>
+    </p:extLst>
+  </p:cSld>
+  <p:clrMapOvr>
+    <a:masterClrMapping/>
+  </p:clrMapOvr>
+</p:sld>
+</file>
+
+<file path=ppt/slides/slide44.xml><?xml version="1.0" encoding="utf-8"?>
+<p:sld xmlns:a="http://schemas.openxmlformats.org/drawingml/2006/main" xmlns:r="http://schemas.openxmlformats.org/officeDocument/2006/relationships" xmlns:p="http://schemas.openxmlformats.org/presentationml/2006/main">
+  <p:cSld>
+    <p:spTree>
+      <p:nvGrpSpPr>
+        <p:cNvPr id="1" name=""/>
+        <p:cNvGrpSpPr/>
+        <p:nvPr/>
+      </p:nvGrpSpPr>
+      <p:grpSpPr>
+        <a:xfrm>
+          <a:off x="0" y="0"/>
+          <a:ext cx="0" cy="0"/>
+          <a:chOff x="0" y="0"/>
+          <a:chExt cx="0" cy="0"/>
+        </a:xfrm>
+      </p:grpSpPr>
+      <p:sp>
+        <p:nvSpPr>
+          <p:cNvPr id="4" name="Title 3">
+            <a:extLst>
+              <a:ext uri="{FF2B5EF4-FFF2-40B4-BE49-F238E27FC236}">
+                <a16:creationId xmlns:a16="http://schemas.microsoft.com/office/drawing/2014/main" id="{2FD58F82-833A-9F41-A63B-54E3D8766BAC}"/>
+              </a:ext>
+            </a:extLst>
+          </p:cNvPr>
+          <p:cNvSpPr>
+            <a:spLocks noGrp="1"/>
+          </p:cNvSpPr>
+          <p:nvPr>
+            <p:ph type="title"/>
+          </p:nvPr>
+        </p:nvSpPr>
+        <p:spPr/>
+        <p:txBody>
+          <a:bodyPr/>
+          <a:lstStyle/>
+          <a:p>
+            <a:r>
+              <a:rPr lang="en-IN" dirty="0" err="1"/>
+              <a:t>ChromaDB</a:t>
+            </a:r>
+            <a:r>
+              <a:rPr lang="en-IN" dirty="0"/>
+              <a:t> Basic Examples</a:t>
+            </a:r>
+            <a:endParaRPr lang="en-GB" dirty="0"/>
+          </a:p>
+        </p:txBody>
+      </p:sp>
+      <p:sp>
+        <p:nvSpPr>
+          <p:cNvPr id="5" name="Text Placeholder 4">
+            <a:extLst>
+              <a:ext uri="{FF2B5EF4-FFF2-40B4-BE49-F238E27FC236}">
+                <a16:creationId xmlns:a16="http://schemas.microsoft.com/office/drawing/2014/main" id="{AC5EEC7D-A9D9-6369-70F8-1DF0245DFB88}"/>
+              </a:ext>
+            </a:extLst>
+          </p:cNvPr>
+          <p:cNvSpPr>
+            <a:spLocks noGrp="1"/>
+          </p:cNvSpPr>
+          <p:nvPr>
+            <p:ph type="body" idx="1"/>
+          </p:nvPr>
+        </p:nvSpPr>
+        <p:spPr/>
+        <p:txBody>
+          <a:bodyPr/>
+          <a:lstStyle/>
+          <a:p>
+            <a:endParaRPr lang="en-GB"/>
+          </a:p>
+        </p:txBody>
+      </p:sp>
+    </p:spTree>
+    <p:extLst>
+      <p:ext uri="{BB962C8B-B14F-4D97-AF65-F5344CB8AC3E}">
+        <p14:creationId xmlns:p14="http://schemas.microsoft.com/office/powerpoint/2010/main" val="2565441142"/>
+      </p:ext>
+    </p:extLst>
+  </p:cSld>
+  <p:clrMapOvr>
+    <a:masterClrMapping/>
+  </p:clrMapOvr>
+</p:sld>
+</file>
+
+<file path=ppt/slides/slide45.xml><?xml version="1.0" encoding="utf-8"?>
+<p:sld xmlns:a="http://schemas.openxmlformats.org/drawingml/2006/main" xmlns:r="http://schemas.openxmlformats.org/officeDocument/2006/relationships" xmlns:p="http://schemas.openxmlformats.org/presentationml/2006/main">
+  <p:cSld>
+    <p:spTree>
+      <p:nvGrpSpPr>
+        <p:cNvPr id="1" name="">
+          <a:extLst>
+            <a:ext uri="{FF2B5EF4-FFF2-40B4-BE49-F238E27FC236}">
+              <a16:creationId xmlns:a16="http://schemas.microsoft.com/office/drawing/2014/main" id="{90710723-BC28-398A-0403-534C405AC94C}"/>
+            </a:ext>
+          </a:extLst>
+        </p:cNvPr>
+        <p:cNvGrpSpPr/>
+        <p:nvPr/>
+      </p:nvGrpSpPr>
+      <p:grpSpPr>
+        <a:xfrm>
+          <a:off x="0" y="0"/>
+          <a:ext cx="0" cy="0"/>
+          <a:chOff x="0" y="0"/>
+          <a:chExt cx="0" cy="0"/>
+        </a:xfrm>
+      </p:grpSpPr>
+      <p:sp>
+        <p:nvSpPr>
+          <p:cNvPr id="2" name="Title 1">
+            <a:extLst>
+              <a:ext uri="{FF2B5EF4-FFF2-40B4-BE49-F238E27FC236}">
+                <a16:creationId xmlns:a16="http://schemas.microsoft.com/office/drawing/2014/main" id="{C77A3F1E-CC78-872E-9A0D-26E7F92AD2E7}"/>
+              </a:ext>
+            </a:extLst>
+          </p:cNvPr>
+          <p:cNvSpPr>
+            <a:spLocks noGrp="1"/>
+          </p:cNvSpPr>
+          <p:nvPr>
+            <p:ph type="title"/>
+          </p:nvPr>
+        </p:nvSpPr>
+        <p:spPr/>
+        <p:txBody>
+          <a:bodyPr>
+            <a:normAutofit/>
+          </a:bodyPr>
+          <a:lstStyle/>
+          <a:p>
+            <a:r>
+              <a:rPr lang="en-IN" dirty="0"/>
+              <a:t>Code Examples (</a:t>
+            </a:r>
+            <a:r>
+              <a:rPr lang="it-IT" dirty="0"/>
+              <a:t>C:\code\agenticai\9_general\rag)</a:t>
+            </a:r>
+            <a:endParaRPr lang="en-GB" dirty="0"/>
+          </a:p>
+        </p:txBody>
+      </p:sp>
+      <p:graphicFrame>
+        <p:nvGraphicFramePr>
+          <p:cNvPr id="4" name="Content Placeholder 3">
+            <a:extLst>
+              <a:ext uri="{FF2B5EF4-FFF2-40B4-BE49-F238E27FC236}">
+                <a16:creationId xmlns:a16="http://schemas.microsoft.com/office/drawing/2014/main" id="{B5272791-5424-E69E-8AF4-AAE597C60378}"/>
+              </a:ext>
+            </a:extLst>
+          </p:cNvPr>
+          <p:cNvGraphicFramePr>
+            <a:graphicFrameLocks noGrp="1"/>
+          </p:cNvGraphicFramePr>
+          <p:nvPr>
+            <p:ph idx="1"/>
+          </p:nvPr>
+        </p:nvGraphicFramePr>
+        <p:xfrm>
+          <a:off x="838200" y="1825625"/>
+          <a:ext cx="10515597" cy="3134360"/>
+        </p:xfrm>
+        <a:graphic>
+          <a:graphicData uri="http://schemas.openxmlformats.org/drawingml/2006/table">
+            <a:tbl>
+              <a:tblPr firstRow="1" bandRow="1">
+                <a:tableStyleId>{72833802-FEF1-4C79-8D5D-14CF1EAF98D9}</a:tableStyleId>
+              </a:tblPr>
+              <a:tblGrid>
+                <a:gridCol w="983620">
+                  <a:extLst>
+                    <a:ext uri="{9D8B030D-6E8A-4147-A177-3AD203B41FA5}">
+                      <a16:colId xmlns:a16="http://schemas.microsoft.com/office/drawing/2014/main" val="1050913285"/>
+                    </a:ext>
+                  </a:extLst>
+                </a:gridCol>
+                <a:gridCol w="4648782">
+                  <a:extLst>
+                    <a:ext uri="{9D8B030D-6E8A-4147-A177-3AD203B41FA5}">
+                      <a16:colId xmlns:a16="http://schemas.microsoft.com/office/drawing/2014/main" val="1840395850"/>
+                    </a:ext>
+                  </a:extLst>
+                </a:gridCol>
+                <a:gridCol w="4883195">
+                  <a:extLst>
+                    <a:ext uri="{9D8B030D-6E8A-4147-A177-3AD203B41FA5}">
+                      <a16:colId xmlns:a16="http://schemas.microsoft.com/office/drawing/2014/main" val="1767616194"/>
+                    </a:ext>
+                  </a:extLst>
+                </a:gridCol>
+              </a:tblGrid>
+              <a:tr h="370840">
+                <a:tc>
+                  <a:txBody>
+                    <a:bodyPr/>
+                    <a:lstStyle/>
+                    <a:p>
+                      <a:r>
+                        <a:rPr lang="en-IN" dirty="0"/>
+                        <a:t>Sr No</a:t>
+                      </a:r>
+                      <a:endParaRPr lang="en-GB" dirty="0"/>
+                    </a:p>
+                  </a:txBody>
+                  <a:tcPr>
+                    <a:lnL w="12700" cap="flat" cmpd="sng" algn="ctr">
+                      <a:solidFill>
+                        <a:schemeClr val="tx1"/>
+                      </a:solidFill>
+                      <a:prstDash val="solid"/>
+                      <a:round/>
+                      <a:headEnd type="none" w="med" len="med"/>
+                      <a:tailEnd type="none" w="med" len="med"/>
+                    </a:lnL>
+                    <a:lnR w="12700" cap="flat" cmpd="sng" algn="ctr">
+                      <a:solidFill>
+                        <a:schemeClr val="tx1"/>
+                      </a:solidFill>
+                      <a:prstDash val="solid"/>
+                      <a:round/>
+                      <a:headEnd type="none" w="med" len="med"/>
+                      <a:tailEnd type="none" w="med" len="med"/>
+                    </a:lnR>
+                    <a:lnT w="12700" cap="flat" cmpd="sng" algn="ctr">
+                      <a:solidFill>
+                        <a:schemeClr val="tx1"/>
+                      </a:solidFill>
+                      <a:prstDash val="solid"/>
+                      <a:round/>
+                      <a:headEnd type="none" w="med" len="med"/>
+                      <a:tailEnd type="none" w="med" len="med"/>
+                    </a:lnT>
+                    <a:lnB w="12700" cap="flat" cmpd="sng" algn="ctr">
+                      <a:solidFill>
+                        <a:schemeClr val="tx1"/>
+                      </a:solidFill>
+                      <a:prstDash val="solid"/>
+                      <a:round/>
+                      <a:headEnd type="none" w="med" len="med"/>
+                      <a:tailEnd type="none" w="med" len="med"/>
+                    </a:lnB>
+                  </a:tcPr>
+                </a:tc>
+                <a:tc>
+                  <a:txBody>
+                    <a:bodyPr/>
+                    <a:lstStyle/>
+                    <a:p>
+                      <a:r>
+                        <a:rPr lang="en-IN" dirty="0"/>
+                        <a:t>File</a:t>
+                      </a:r>
+                      <a:endParaRPr lang="en-GB" dirty="0"/>
+                    </a:p>
+                  </a:txBody>
+                  <a:tcPr>
+                    <a:lnL w="12700" cap="flat" cmpd="sng" algn="ctr">
+                      <a:solidFill>
+                        <a:schemeClr val="tx1"/>
+                      </a:solidFill>
+                      <a:prstDash val="solid"/>
+                      <a:round/>
+                      <a:headEnd type="none" w="med" len="med"/>
+                      <a:tailEnd type="none" w="med" len="med"/>
+                    </a:lnL>
+                    <a:lnR w="12700" cap="flat" cmpd="sng" algn="ctr">
+                      <a:solidFill>
+                        <a:schemeClr val="tx1"/>
+                      </a:solidFill>
+                      <a:prstDash val="solid"/>
+                      <a:round/>
+                      <a:headEnd type="none" w="med" len="med"/>
+                      <a:tailEnd type="none" w="med" len="med"/>
+                    </a:lnR>
+                    <a:lnT w="12700" cap="flat" cmpd="sng" algn="ctr">
+                      <a:solidFill>
+                        <a:schemeClr val="tx1"/>
+                      </a:solidFill>
+                      <a:prstDash val="solid"/>
+                      <a:round/>
+                      <a:headEnd type="none" w="med" len="med"/>
+                      <a:tailEnd type="none" w="med" len="med"/>
+                    </a:lnT>
+                    <a:lnB w="12700" cap="flat" cmpd="sng" algn="ctr">
+                      <a:solidFill>
+                        <a:schemeClr val="tx1"/>
+                      </a:solidFill>
+                      <a:prstDash val="solid"/>
+                      <a:round/>
+                      <a:headEnd type="none" w="med" len="med"/>
+                      <a:tailEnd type="none" w="med" len="med"/>
+                    </a:lnB>
+                  </a:tcPr>
+                </a:tc>
+                <a:tc>
+                  <a:txBody>
+                    <a:bodyPr/>
+                    <a:lstStyle/>
+                    <a:p>
+                      <a:r>
+                        <a:rPr lang="en-IN" dirty="0"/>
+                        <a:t>Purpose</a:t>
+                      </a:r>
+                      <a:endParaRPr lang="en-GB" dirty="0"/>
+                    </a:p>
+                  </a:txBody>
+                  <a:tcPr>
+                    <a:lnL w="12700" cap="flat" cmpd="sng" algn="ctr">
+                      <a:solidFill>
+                        <a:schemeClr val="tx1"/>
+                      </a:solidFill>
+                      <a:prstDash val="solid"/>
+                      <a:round/>
+                      <a:headEnd type="none" w="med" len="med"/>
+                      <a:tailEnd type="none" w="med" len="med"/>
+                    </a:lnL>
+                    <a:lnR w="12700" cap="flat" cmpd="sng" algn="ctr">
+                      <a:solidFill>
+                        <a:schemeClr val="tx1"/>
+                      </a:solidFill>
+                      <a:prstDash val="solid"/>
+                      <a:round/>
+                      <a:headEnd type="none" w="med" len="med"/>
+                      <a:tailEnd type="none" w="med" len="med"/>
+                    </a:lnR>
+                    <a:lnT w="12700" cap="flat" cmpd="sng" algn="ctr">
+                      <a:solidFill>
+                        <a:schemeClr val="tx1"/>
+                      </a:solidFill>
+                      <a:prstDash val="solid"/>
+                      <a:round/>
+                      <a:headEnd type="none" w="med" len="med"/>
+                      <a:tailEnd type="none" w="med" len="med"/>
+                    </a:lnT>
+                    <a:lnB w="12700" cap="flat" cmpd="sng" algn="ctr">
+                      <a:solidFill>
+                        <a:schemeClr val="tx1"/>
+                      </a:solidFill>
+                      <a:prstDash val="solid"/>
+                      <a:round/>
+                      <a:headEnd type="none" w="med" len="med"/>
+                      <a:tailEnd type="none" w="med" len="med"/>
+                    </a:lnB>
+                  </a:tcPr>
+                </a:tc>
+                <a:extLst>
+                  <a:ext uri="{0D108BD9-81ED-4DB2-BD59-A6C34878D82A}">
+                    <a16:rowId xmlns:a16="http://schemas.microsoft.com/office/drawing/2014/main" val="4031901816"/>
+                  </a:ext>
+                </a:extLst>
+              </a:tr>
+              <a:tr h="370840">
+                <a:tc>
+                  <a:txBody>
+                    <a:bodyPr/>
+                    <a:lstStyle/>
+                    <a:p>
+                      <a:r>
+                        <a:rPr lang="en-IN" dirty="0"/>
+                        <a:t>1</a:t>
+                      </a:r>
+                      <a:endParaRPr lang="en-GB" dirty="0"/>
+                    </a:p>
+                  </a:txBody>
+                  <a:tcPr>
+                    <a:lnL w="12700" cap="flat" cmpd="sng" algn="ctr">
+                      <a:solidFill>
+                        <a:schemeClr val="tx1"/>
+                      </a:solidFill>
+                      <a:prstDash val="solid"/>
+                      <a:round/>
+                      <a:headEnd type="none" w="med" len="med"/>
+                      <a:tailEnd type="none" w="med" len="med"/>
+                    </a:lnL>
+                    <a:lnR w="12700" cap="flat" cmpd="sng" algn="ctr">
+                      <a:solidFill>
+                        <a:schemeClr val="tx1"/>
+                      </a:solidFill>
+                      <a:prstDash val="solid"/>
+                      <a:round/>
+                      <a:headEnd type="none" w="med" len="med"/>
+                      <a:tailEnd type="none" w="med" len="med"/>
+                    </a:lnR>
+                    <a:lnT w="12700" cap="flat" cmpd="sng" algn="ctr">
+                      <a:solidFill>
+                        <a:schemeClr val="tx1"/>
+                      </a:solidFill>
+                      <a:prstDash val="solid"/>
+                      <a:round/>
+                      <a:headEnd type="none" w="med" len="med"/>
+                      <a:tailEnd type="none" w="med" len="med"/>
+                    </a:lnT>
+                    <a:lnB w="12700" cap="flat" cmpd="sng" algn="ctr">
+                      <a:solidFill>
+                        <a:schemeClr val="tx1"/>
+                      </a:solidFill>
+                      <a:prstDash val="solid"/>
+                      <a:round/>
+                      <a:headEnd type="none" w="med" len="med"/>
+                      <a:tailEnd type="none" w="med" len="med"/>
+                    </a:lnB>
+                  </a:tcPr>
+                </a:tc>
+                <a:tc>
+                  <a:txBody>
+                    <a:bodyPr/>
+                    <a:lstStyle/>
+                    <a:p>
+                      <a:r>
+                        <a:rPr lang="en-US" dirty="0"/>
+                        <a:t>rag_1_chroma_db_basic.py</a:t>
+                      </a:r>
+                      <a:endParaRPr lang="en-GB" dirty="0"/>
+                    </a:p>
+                  </a:txBody>
+                  <a:tcPr>
+                    <a:lnL w="12700" cap="flat" cmpd="sng" algn="ctr">
+                      <a:solidFill>
+                        <a:schemeClr val="tx1"/>
+                      </a:solidFill>
+                      <a:prstDash val="solid"/>
+                      <a:round/>
+                      <a:headEnd type="none" w="med" len="med"/>
+                      <a:tailEnd type="none" w="med" len="med"/>
+                    </a:lnL>
+                    <a:lnR w="12700" cap="flat" cmpd="sng" algn="ctr">
+                      <a:solidFill>
+                        <a:schemeClr val="tx1"/>
+                      </a:solidFill>
+                      <a:prstDash val="solid"/>
+                      <a:round/>
+                      <a:headEnd type="none" w="med" len="med"/>
+                      <a:tailEnd type="none" w="med" len="med"/>
+                    </a:lnR>
+                    <a:lnT w="12700" cap="flat" cmpd="sng" algn="ctr">
+                      <a:solidFill>
+                        <a:schemeClr val="tx1"/>
+                      </a:solidFill>
+                      <a:prstDash val="solid"/>
+                      <a:round/>
+                      <a:headEnd type="none" w="med" len="med"/>
+                      <a:tailEnd type="none" w="med" len="med"/>
+                    </a:lnT>
+                    <a:lnB w="12700" cap="flat" cmpd="sng" algn="ctr">
+                      <a:solidFill>
+                        <a:schemeClr val="tx1"/>
+                      </a:solidFill>
+                      <a:prstDash val="solid"/>
+                      <a:round/>
+                      <a:headEnd type="none" w="med" len="med"/>
+                      <a:tailEnd type="none" w="med" len="med"/>
+                    </a:lnB>
+                  </a:tcPr>
+                </a:tc>
+                <a:tc>
+                  <a:txBody>
+                    <a:bodyPr/>
+                    <a:lstStyle/>
+                    <a:p>
+                      <a:r>
+                        <a:rPr lang="en-IN" dirty="0"/>
+                        <a:t>Basic </a:t>
+                      </a:r>
+                      <a:r>
+                        <a:rPr lang="en-IN" dirty="0" err="1"/>
+                        <a:t>ChromaDB</a:t>
+                      </a:r>
+                      <a:r>
+                        <a:rPr lang="en-IN" dirty="0"/>
+                        <a:t> example</a:t>
+                      </a:r>
+                      <a:endParaRPr lang="en-GB" dirty="0"/>
+                    </a:p>
+                  </a:txBody>
+                  <a:tcPr>
+                    <a:lnL w="12700" cap="flat" cmpd="sng" algn="ctr">
+                      <a:solidFill>
+                        <a:schemeClr val="tx1"/>
+                      </a:solidFill>
+                      <a:prstDash val="solid"/>
+                      <a:round/>
+                      <a:headEnd type="none" w="med" len="med"/>
+                      <a:tailEnd type="none" w="med" len="med"/>
+                    </a:lnL>
+                    <a:lnR w="12700" cap="flat" cmpd="sng" algn="ctr">
+                      <a:solidFill>
+                        <a:schemeClr val="tx1"/>
+                      </a:solidFill>
+                      <a:prstDash val="solid"/>
+                      <a:round/>
+                      <a:headEnd type="none" w="med" len="med"/>
+                      <a:tailEnd type="none" w="med" len="med"/>
+                    </a:lnR>
+                    <a:lnT w="12700" cap="flat" cmpd="sng" algn="ctr">
+                      <a:solidFill>
+                        <a:schemeClr val="tx1"/>
+                      </a:solidFill>
+                      <a:prstDash val="solid"/>
+                      <a:round/>
+                      <a:headEnd type="none" w="med" len="med"/>
+                      <a:tailEnd type="none" w="med" len="med"/>
+                    </a:lnT>
+                    <a:lnB w="12700" cap="flat" cmpd="sng" algn="ctr">
+                      <a:solidFill>
+                        <a:schemeClr val="tx1"/>
+                      </a:solidFill>
+                      <a:prstDash val="solid"/>
+                      <a:round/>
+                      <a:headEnd type="none" w="med" len="med"/>
+                      <a:tailEnd type="none" w="med" len="med"/>
+                    </a:lnB>
+                  </a:tcPr>
+                </a:tc>
+                <a:extLst>
+                  <a:ext uri="{0D108BD9-81ED-4DB2-BD59-A6C34878D82A}">
+                    <a16:rowId xmlns:a16="http://schemas.microsoft.com/office/drawing/2014/main" val="3550129446"/>
+                  </a:ext>
+                </a:extLst>
+              </a:tr>
+              <a:tr h="370840">
+                <a:tc>
+                  <a:txBody>
+                    <a:bodyPr/>
+                    <a:lstStyle/>
+                    <a:p>
+                      <a:r>
+                        <a:rPr lang="en-IN" dirty="0"/>
+                        <a:t>2</a:t>
+                      </a:r>
+                      <a:endParaRPr lang="en-GB" dirty="0"/>
+                    </a:p>
+                  </a:txBody>
+                  <a:tcPr>
+                    <a:lnL w="12700" cap="flat" cmpd="sng" algn="ctr">
+                      <a:solidFill>
+                        <a:schemeClr val="tx1"/>
+                      </a:solidFill>
+                      <a:prstDash val="solid"/>
+                      <a:round/>
+                      <a:headEnd type="none" w="med" len="med"/>
+                      <a:tailEnd type="none" w="med" len="med"/>
+                    </a:lnL>
+                    <a:lnR w="12700" cap="flat" cmpd="sng" algn="ctr">
+                      <a:solidFill>
+                        <a:schemeClr val="tx1"/>
+                      </a:solidFill>
+                      <a:prstDash val="solid"/>
+                      <a:round/>
+                      <a:headEnd type="none" w="med" len="med"/>
+                      <a:tailEnd type="none" w="med" len="med"/>
+                    </a:lnR>
+                    <a:lnT w="12700" cap="flat" cmpd="sng" algn="ctr">
+                      <a:solidFill>
+                        <a:schemeClr val="tx1"/>
+                      </a:solidFill>
+                      <a:prstDash val="solid"/>
+                      <a:round/>
+                      <a:headEnd type="none" w="med" len="med"/>
+                      <a:tailEnd type="none" w="med" len="med"/>
+                    </a:lnT>
+                    <a:lnB w="12700" cap="flat" cmpd="sng" algn="ctr">
+                      <a:solidFill>
+                        <a:schemeClr val="tx1"/>
+                      </a:solidFill>
+                      <a:prstDash val="solid"/>
+                      <a:round/>
+                      <a:headEnd type="none" w="med" len="med"/>
+                      <a:tailEnd type="none" w="med" len="med"/>
+                    </a:lnB>
+                  </a:tcPr>
+                </a:tc>
+                <a:tc>
+                  <a:txBody>
+                    <a:bodyPr/>
+                    <a:lstStyle/>
+                    <a:p>
+                      <a:pPr marL="0" marR="0" lvl="0" indent="0" algn="l" defTabSz="914400" rtl="0" eaLnBrk="1" fontAlgn="auto" latinLnBrk="0" hangingPunct="1">
+                        <a:lnSpc>
+                          <a:spcPct val="100000"/>
+                        </a:lnSpc>
+                        <a:spcBef>
+                          <a:spcPts val="0"/>
+                        </a:spcBef>
+                        <a:spcAft>
+                          <a:spcPts val="0"/>
+                        </a:spcAft>
+                        <a:buClrTx/>
+                        <a:buSzTx/>
+                        <a:buFontTx/>
+                        <a:buNone/>
+                        <a:tabLst/>
+                        <a:defRPr/>
+                      </a:pPr>
+                      <a:r>
+                        <a:rPr lang="en-GB" dirty="0"/>
+                        <a:t>rag_2_chroma_db_persistent_client.py</a:t>
+                      </a:r>
+                    </a:p>
+                  </a:txBody>
+                  <a:tcPr>
+                    <a:lnL w="12700" cap="flat" cmpd="sng" algn="ctr">
+                      <a:solidFill>
+                        <a:schemeClr val="tx1"/>
+                      </a:solidFill>
+                      <a:prstDash val="solid"/>
+                      <a:round/>
+                      <a:headEnd type="none" w="med" len="med"/>
+                      <a:tailEnd type="none" w="med" len="med"/>
+                    </a:lnL>
+                    <a:lnR w="12700" cap="flat" cmpd="sng" algn="ctr">
+                      <a:solidFill>
+                        <a:schemeClr val="tx1"/>
+                      </a:solidFill>
+                      <a:prstDash val="solid"/>
+                      <a:round/>
+                      <a:headEnd type="none" w="med" len="med"/>
+                      <a:tailEnd type="none" w="med" len="med"/>
+                    </a:lnR>
+                    <a:lnT w="12700" cap="flat" cmpd="sng" algn="ctr">
+                      <a:solidFill>
+                        <a:schemeClr val="tx1"/>
+                      </a:solidFill>
+                      <a:prstDash val="solid"/>
+                      <a:round/>
+                      <a:headEnd type="none" w="med" len="med"/>
+                      <a:tailEnd type="none" w="med" len="med"/>
+                    </a:lnT>
+                    <a:lnB w="12700" cap="flat" cmpd="sng" algn="ctr">
+                      <a:solidFill>
+                        <a:schemeClr val="tx1"/>
+                      </a:solidFill>
+                      <a:prstDash val="solid"/>
+                      <a:round/>
+                      <a:headEnd type="none" w="med" len="med"/>
+                      <a:tailEnd type="none" w="med" len="med"/>
+                    </a:lnB>
+                  </a:tcPr>
+                </a:tc>
+                <a:tc>
+                  <a:txBody>
+                    <a:bodyPr/>
+                    <a:lstStyle/>
+                    <a:p>
+                      <a:r>
+                        <a:rPr lang="en-IN" dirty="0"/>
+                        <a:t>Persisting vector data</a:t>
+                      </a:r>
+                      <a:endParaRPr lang="en-GB" dirty="0"/>
+                    </a:p>
+                  </a:txBody>
+                  <a:tcPr>
+                    <a:lnL w="12700" cap="flat" cmpd="sng" algn="ctr">
+                      <a:solidFill>
+                        <a:schemeClr val="tx1"/>
+                      </a:solidFill>
+                      <a:prstDash val="solid"/>
+                      <a:round/>
+                      <a:headEnd type="none" w="med" len="med"/>
+                      <a:tailEnd type="none" w="med" len="med"/>
+                    </a:lnL>
+                    <a:lnR w="12700" cap="flat" cmpd="sng" algn="ctr">
+                      <a:solidFill>
+                        <a:schemeClr val="tx1"/>
+                      </a:solidFill>
+                      <a:prstDash val="solid"/>
+                      <a:round/>
+                      <a:headEnd type="none" w="med" len="med"/>
+                      <a:tailEnd type="none" w="med" len="med"/>
+                    </a:lnR>
+                    <a:lnT w="12700" cap="flat" cmpd="sng" algn="ctr">
+                      <a:solidFill>
+                        <a:schemeClr val="tx1"/>
+                      </a:solidFill>
+                      <a:prstDash val="solid"/>
+                      <a:round/>
+                      <a:headEnd type="none" w="med" len="med"/>
+                      <a:tailEnd type="none" w="med" len="med"/>
+                    </a:lnT>
+                    <a:lnB w="12700" cap="flat" cmpd="sng" algn="ctr">
+                      <a:solidFill>
+                        <a:schemeClr val="tx1"/>
+                      </a:solidFill>
+                      <a:prstDash val="solid"/>
+                      <a:round/>
+                      <a:headEnd type="none" w="med" len="med"/>
+                      <a:tailEnd type="none" w="med" len="med"/>
+                    </a:lnB>
+                  </a:tcPr>
+                </a:tc>
+                <a:extLst>
+                  <a:ext uri="{0D108BD9-81ED-4DB2-BD59-A6C34878D82A}">
+                    <a16:rowId xmlns:a16="http://schemas.microsoft.com/office/drawing/2014/main" val="3465696953"/>
+                  </a:ext>
+                </a:extLst>
+              </a:tr>
+              <a:tr h="370840">
+                <a:tc>
+                  <a:txBody>
+                    <a:bodyPr/>
+                    <a:lstStyle/>
+                    <a:p>
+                      <a:r>
+                        <a:rPr lang="en-IN" dirty="0"/>
+                        <a:t>3</a:t>
+                      </a:r>
+                      <a:endParaRPr lang="en-GB" dirty="0"/>
+                    </a:p>
+                  </a:txBody>
+                  <a:tcPr>
+                    <a:lnL w="12700" cap="flat" cmpd="sng" algn="ctr">
+                      <a:solidFill>
+                        <a:schemeClr val="tx1"/>
+                      </a:solidFill>
+                      <a:prstDash val="solid"/>
+                      <a:round/>
+                      <a:headEnd type="none" w="med" len="med"/>
+                      <a:tailEnd type="none" w="med" len="med"/>
+                    </a:lnL>
+                    <a:lnR w="12700" cap="flat" cmpd="sng" algn="ctr">
+                      <a:solidFill>
+                        <a:schemeClr val="tx1"/>
+                      </a:solidFill>
+                      <a:prstDash val="solid"/>
+                      <a:round/>
+                      <a:headEnd type="none" w="med" len="med"/>
+                      <a:tailEnd type="none" w="med" len="med"/>
+                    </a:lnR>
+                    <a:lnT w="12700" cap="flat" cmpd="sng" algn="ctr">
+                      <a:solidFill>
+                        <a:schemeClr val="tx1"/>
+                      </a:solidFill>
+                      <a:prstDash val="solid"/>
+                      <a:round/>
+                      <a:headEnd type="none" w="med" len="med"/>
+                      <a:tailEnd type="none" w="med" len="med"/>
+                    </a:lnT>
+                    <a:lnB w="12700" cap="flat" cmpd="sng" algn="ctr">
+                      <a:solidFill>
+                        <a:schemeClr val="tx1"/>
+                      </a:solidFill>
+                      <a:prstDash val="solid"/>
+                      <a:round/>
+                      <a:headEnd type="none" w="med" len="med"/>
+                      <a:tailEnd type="none" w="med" len="med"/>
+                    </a:lnB>
+                  </a:tcPr>
+                </a:tc>
+                <a:tc>
+                  <a:txBody>
+                    <a:bodyPr/>
+                    <a:lstStyle/>
+                    <a:p>
+                      <a:pPr marL="0" marR="0" lvl="0" indent="0" algn="l" defTabSz="914400" rtl="0" eaLnBrk="1" fontAlgn="auto" latinLnBrk="0" hangingPunct="1">
+                        <a:lnSpc>
+                          <a:spcPct val="100000"/>
+                        </a:lnSpc>
+                        <a:spcBef>
+                          <a:spcPts val="0"/>
+                        </a:spcBef>
+                        <a:spcAft>
+                          <a:spcPts val="0"/>
+                        </a:spcAft>
+                        <a:buClrTx/>
+                        <a:buSzTx/>
+                        <a:buFontTx/>
+                        <a:buNone/>
+                        <a:tabLst/>
+                        <a:defRPr/>
+                      </a:pPr>
+                      <a:r>
+                        <a:rPr lang="en-US" dirty="0"/>
+                        <a:t>rag_3_chroma_db_hugging_face_embeddings</a:t>
+                      </a:r>
+                      <a:endParaRPr lang="en-GB" dirty="0"/>
+                    </a:p>
+                  </a:txBody>
+                  <a:tcPr>
+                    <a:lnL w="12700" cap="flat" cmpd="sng" algn="ctr">
+                      <a:solidFill>
+                        <a:schemeClr val="tx1"/>
+                      </a:solidFill>
+                      <a:prstDash val="solid"/>
+                      <a:round/>
+                      <a:headEnd type="none" w="med" len="med"/>
+                      <a:tailEnd type="none" w="med" len="med"/>
+                    </a:lnL>
+                    <a:lnR w="12700" cap="flat" cmpd="sng" algn="ctr">
+                      <a:solidFill>
+                        <a:schemeClr val="tx1"/>
+                      </a:solidFill>
+                      <a:prstDash val="solid"/>
+                      <a:round/>
+                      <a:headEnd type="none" w="med" len="med"/>
+                      <a:tailEnd type="none" w="med" len="med"/>
+                    </a:lnR>
+                    <a:lnT w="12700" cap="flat" cmpd="sng" algn="ctr">
+                      <a:solidFill>
+                        <a:schemeClr val="tx1"/>
+                      </a:solidFill>
+                      <a:prstDash val="solid"/>
+                      <a:round/>
+                      <a:headEnd type="none" w="med" len="med"/>
+                      <a:tailEnd type="none" w="med" len="med"/>
+                    </a:lnT>
+                    <a:lnB w="12700" cap="flat" cmpd="sng" algn="ctr">
+                      <a:solidFill>
+                        <a:schemeClr val="tx1"/>
+                      </a:solidFill>
+                      <a:prstDash val="solid"/>
+                      <a:round/>
+                      <a:headEnd type="none" w="med" len="med"/>
+                      <a:tailEnd type="none" w="med" len="med"/>
+                    </a:lnB>
+                  </a:tcPr>
+                </a:tc>
+                <a:tc>
+                  <a:txBody>
+                    <a:bodyPr/>
+                    <a:lstStyle/>
+                    <a:p>
+                      <a:r>
+                        <a:rPr lang="en-IN" dirty="0"/>
+                        <a:t>Using Hugging Face embeddings, instead of default </a:t>
+                      </a:r>
+                      <a:r>
+                        <a:rPr lang="en-IN" dirty="0" err="1"/>
+                        <a:t>ChromaDB</a:t>
+                      </a:r>
+                      <a:r>
+                        <a:rPr lang="en-IN" dirty="0"/>
+                        <a:t> embeddings</a:t>
+                      </a:r>
+                      <a:endParaRPr lang="en-GB" dirty="0"/>
+                    </a:p>
+                  </a:txBody>
+                  <a:tcPr>
+                    <a:lnL w="12700" cap="flat" cmpd="sng" algn="ctr">
+                      <a:solidFill>
+                        <a:schemeClr val="tx1"/>
+                      </a:solidFill>
+                      <a:prstDash val="solid"/>
+                      <a:round/>
+                      <a:headEnd type="none" w="med" len="med"/>
+                      <a:tailEnd type="none" w="med" len="med"/>
+                    </a:lnL>
+                    <a:lnR w="12700" cap="flat" cmpd="sng" algn="ctr">
+                      <a:solidFill>
+                        <a:schemeClr val="tx1"/>
+                      </a:solidFill>
+                      <a:prstDash val="solid"/>
+                      <a:round/>
+                      <a:headEnd type="none" w="med" len="med"/>
+                      <a:tailEnd type="none" w="med" len="med"/>
+                    </a:lnR>
+                    <a:lnT w="12700" cap="flat" cmpd="sng" algn="ctr">
+                      <a:solidFill>
+                        <a:schemeClr val="tx1"/>
+                      </a:solidFill>
+                      <a:prstDash val="solid"/>
+                      <a:round/>
+                      <a:headEnd type="none" w="med" len="med"/>
+                      <a:tailEnd type="none" w="med" len="med"/>
+                    </a:lnT>
+                    <a:lnB w="12700" cap="flat" cmpd="sng" algn="ctr">
+                      <a:solidFill>
+                        <a:schemeClr val="tx1"/>
+                      </a:solidFill>
+                      <a:prstDash val="solid"/>
+                      <a:round/>
+                      <a:headEnd type="none" w="med" len="med"/>
+                      <a:tailEnd type="none" w="med" len="med"/>
+                    </a:lnB>
+                  </a:tcPr>
+                </a:tc>
+                <a:extLst>
+                  <a:ext uri="{0D108BD9-81ED-4DB2-BD59-A6C34878D82A}">
+                    <a16:rowId xmlns:a16="http://schemas.microsoft.com/office/drawing/2014/main" val="2170792430"/>
+                  </a:ext>
+                </a:extLst>
+              </a:tr>
+              <a:tr h="370840">
+                <a:tc>
+                  <a:txBody>
+                    <a:bodyPr/>
+                    <a:lstStyle/>
+                    <a:p>
+                      <a:r>
+                        <a:rPr lang="en-IN" dirty="0"/>
+                        <a:t>4</a:t>
+                      </a:r>
+                      <a:endParaRPr lang="en-GB" dirty="0"/>
+                    </a:p>
+                  </a:txBody>
+                  <a:tcPr>
+                    <a:lnL w="12700" cap="flat" cmpd="sng" algn="ctr">
+                      <a:solidFill>
+                        <a:schemeClr val="tx1"/>
+                      </a:solidFill>
+                      <a:prstDash val="solid"/>
+                      <a:round/>
+                      <a:headEnd type="none" w="med" len="med"/>
+                      <a:tailEnd type="none" w="med" len="med"/>
+                    </a:lnL>
+                    <a:lnR w="12700" cap="flat" cmpd="sng" algn="ctr">
+                      <a:solidFill>
+                        <a:schemeClr val="tx1"/>
+                      </a:solidFill>
+                      <a:prstDash val="solid"/>
+                      <a:round/>
+                      <a:headEnd type="none" w="med" len="med"/>
+                      <a:tailEnd type="none" w="med" len="med"/>
+                    </a:lnR>
+                    <a:lnT w="12700" cap="flat" cmpd="sng" algn="ctr">
+                      <a:solidFill>
+                        <a:schemeClr val="tx1"/>
+                      </a:solidFill>
+                      <a:prstDash val="solid"/>
+                      <a:round/>
+                      <a:headEnd type="none" w="med" len="med"/>
+                      <a:tailEnd type="none" w="med" len="med"/>
+                    </a:lnT>
+                    <a:lnB w="12700" cap="flat" cmpd="sng" algn="ctr">
+                      <a:solidFill>
+                        <a:schemeClr val="tx1"/>
+                      </a:solidFill>
+                      <a:prstDash val="solid"/>
+                      <a:round/>
+                      <a:headEnd type="none" w="med" len="med"/>
+                      <a:tailEnd type="none" w="med" len="med"/>
+                    </a:lnB>
+                  </a:tcPr>
+                </a:tc>
+                <a:tc>
+                  <a:txBody>
+                    <a:bodyPr/>
+                    <a:lstStyle/>
+                    <a:p>
+                      <a:pPr marL="0" marR="0" lvl="0" indent="0" algn="l" defTabSz="914400" rtl="0" eaLnBrk="1" fontAlgn="auto" latinLnBrk="0" hangingPunct="1">
+                        <a:lnSpc>
+                          <a:spcPct val="100000"/>
+                        </a:lnSpc>
+                        <a:spcBef>
+                          <a:spcPts val="0"/>
+                        </a:spcBef>
+                        <a:spcAft>
+                          <a:spcPts val="0"/>
+                        </a:spcAft>
+                        <a:buClrTx/>
+                        <a:buSzTx/>
+                        <a:buFontTx/>
+                        <a:buNone/>
+                        <a:tabLst/>
+                        <a:defRPr/>
+                      </a:pPr>
+                      <a:r>
+                        <a:rPr lang="en-GB" dirty="0"/>
+                        <a:t>rag_4_chroma_db_adding_metadata.py</a:t>
+                      </a:r>
+                    </a:p>
+                  </a:txBody>
+                  <a:tcPr>
+                    <a:lnL w="12700" cap="flat" cmpd="sng" algn="ctr">
+                      <a:solidFill>
+                        <a:schemeClr val="tx1"/>
+                      </a:solidFill>
+                      <a:prstDash val="solid"/>
+                      <a:round/>
+                      <a:headEnd type="none" w="med" len="med"/>
+                      <a:tailEnd type="none" w="med" len="med"/>
+                    </a:lnL>
+                    <a:lnR w="12700" cap="flat" cmpd="sng" algn="ctr">
+                      <a:solidFill>
+                        <a:schemeClr val="tx1"/>
+                      </a:solidFill>
+                      <a:prstDash val="solid"/>
+                      <a:round/>
+                      <a:headEnd type="none" w="med" len="med"/>
+                      <a:tailEnd type="none" w="med" len="med"/>
+                    </a:lnR>
+                    <a:lnT w="12700" cap="flat" cmpd="sng" algn="ctr">
+                      <a:solidFill>
+                        <a:schemeClr val="tx1"/>
+                      </a:solidFill>
+                      <a:prstDash val="solid"/>
+                      <a:round/>
+                      <a:headEnd type="none" w="med" len="med"/>
+                      <a:tailEnd type="none" w="med" len="med"/>
+                    </a:lnT>
+                    <a:lnB w="12700" cap="flat" cmpd="sng" algn="ctr">
+                      <a:solidFill>
+                        <a:schemeClr val="tx1"/>
+                      </a:solidFill>
+                      <a:prstDash val="solid"/>
+                      <a:round/>
+                      <a:headEnd type="none" w="med" len="med"/>
+                      <a:tailEnd type="none" w="med" len="med"/>
+                    </a:lnB>
+                  </a:tcPr>
+                </a:tc>
+                <a:tc>
+                  <a:txBody>
+                    <a:bodyPr/>
+                    <a:lstStyle/>
+                    <a:p>
+                      <a:r>
+                        <a:rPr lang="en-IN" dirty="0"/>
+                        <a:t>Adding metadata</a:t>
+                      </a:r>
+                      <a:endParaRPr lang="en-GB" dirty="0"/>
+                    </a:p>
+                  </a:txBody>
+                  <a:tcPr>
+                    <a:lnL w="12700" cap="flat" cmpd="sng" algn="ctr">
+                      <a:solidFill>
+                        <a:schemeClr val="tx1"/>
+                      </a:solidFill>
+                      <a:prstDash val="solid"/>
+                      <a:round/>
+                      <a:headEnd type="none" w="med" len="med"/>
+                      <a:tailEnd type="none" w="med" len="med"/>
+                    </a:lnL>
+                    <a:lnR w="12700" cap="flat" cmpd="sng" algn="ctr">
+                      <a:solidFill>
+                        <a:schemeClr val="tx1"/>
+                      </a:solidFill>
+                      <a:prstDash val="solid"/>
+                      <a:round/>
+                      <a:headEnd type="none" w="med" len="med"/>
+                      <a:tailEnd type="none" w="med" len="med"/>
+                    </a:lnR>
+                    <a:lnT w="12700" cap="flat" cmpd="sng" algn="ctr">
+                      <a:solidFill>
+                        <a:schemeClr val="tx1"/>
+                      </a:solidFill>
+                      <a:prstDash val="solid"/>
+                      <a:round/>
+                      <a:headEnd type="none" w="med" len="med"/>
+                      <a:tailEnd type="none" w="med" len="med"/>
+                    </a:lnT>
+                    <a:lnB w="12700" cap="flat" cmpd="sng" algn="ctr">
+                      <a:solidFill>
+                        <a:schemeClr val="tx1"/>
+                      </a:solidFill>
+                      <a:prstDash val="solid"/>
+                      <a:round/>
+                      <a:headEnd type="none" w="med" len="med"/>
+                      <a:tailEnd type="none" w="med" len="med"/>
+                    </a:lnB>
+                  </a:tcPr>
+                </a:tc>
+                <a:extLst>
+                  <a:ext uri="{0D108BD9-81ED-4DB2-BD59-A6C34878D82A}">
+                    <a16:rowId xmlns:a16="http://schemas.microsoft.com/office/drawing/2014/main" val="1435939174"/>
+                  </a:ext>
+                </a:extLst>
+              </a:tr>
+              <a:tr h="370840">
+                <a:tc>
+                  <a:txBody>
+                    <a:bodyPr/>
+                    <a:lstStyle/>
+                    <a:p>
+                      <a:r>
+                        <a:rPr lang="en-IN" dirty="0"/>
+                        <a:t>5</a:t>
+                      </a:r>
+                      <a:endParaRPr lang="en-GB" dirty="0"/>
+                    </a:p>
+                  </a:txBody>
+                  <a:tcPr>
+                    <a:lnL w="12700" cap="flat" cmpd="sng" algn="ctr">
+                      <a:solidFill>
+                        <a:schemeClr val="tx1"/>
+                      </a:solidFill>
+                      <a:prstDash val="solid"/>
+                      <a:round/>
+                      <a:headEnd type="none" w="med" len="med"/>
+                      <a:tailEnd type="none" w="med" len="med"/>
+                    </a:lnL>
+                    <a:lnR w="12700" cap="flat" cmpd="sng" algn="ctr">
+                      <a:solidFill>
+                        <a:schemeClr val="tx1"/>
+                      </a:solidFill>
+                      <a:prstDash val="solid"/>
+                      <a:round/>
+                      <a:headEnd type="none" w="med" len="med"/>
+                      <a:tailEnd type="none" w="med" len="med"/>
+                    </a:lnR>
+                    <a:lnT w="12700" cap="flat" cmpd="sng" algn="ctr">
+                      <a:solidFill>
+                        <a:schemeClr val="tx1"/>
+                      </a:solidFill>
+                      <a:prstDash val="solid"/>
+                      <a:round/>
+                      <a:headEnd type="none" w="med" len="med"/>
+                      <a:tailEnd type="none" w="med" len="med"/>
+                    </a:lnT>
+                    <a:lnB w="12700" cap="flat" cmpd="sng" algn="ctr">
+                      <a:solidFill>
+                        <a:schemeClr val="tx1"/>
+                      </a:solidFill>
+                      <a:prstDash val="solid"/>
+                      <a:round/>
+                      <a:headEnd type="none" w="med" len="med"/>
+                      <a:tailEnd type="none" w="med" len="med"/>
+                    </a:lnB>
+                  </a:tcPr>
+                </a:tc>
+                <a:tc>
+                  <a:txBody>
+                    <a:bodyPr/>
+                    <a:lstStyle/>
+                    <a:p>
+                      <a:pPr marL="0" marR="0" lvl="0" indent="0" algn="l" defTabSz="914400" rtl="0" eaLnBrk="1" fontAlgn="auto" latinLnBrk="0" hangingPunct="1">
+                        <a:lnSpc>
+                          <a:spcPct val="100000"/>
+                        </a:lnSpc>
+                        <a:spcBef>
+                          <a:spcPts val="0"/>
+                        </a:spcBef>
+                        <a:spcAft>
+                          <a:spcPts val="0"/>
+                        </a:spcAft>
+                        <a:buClrTx/>
+                        <a:buSzTx/>
+                        <a:buFontTx/>
+                        <a:buNone/>
+                        <a:tabLst/>
+                        <a:defRPr/>
+                      </a:pPr>
+                      <a:r>
+                        <a:rPr lang="en-GB" dirty="0"/>
+                        <a:t>rag_5_chroma_db_adding_metadata_to_query.py</a:t>
+                      </a:r>
+                    </a:p>
+                  </a:txBody>
+                  <a:tcPr>
+                    <a:lnL w="12700" cap="flat" cmpd="sng" algn="ctr">
+                      <a:solidFill>
+                        <a:schemeClr val="tx1"/>
+                      </a:solidFill>
+                      <a:prstDash val="solid"/>
+                      <a:round/>
+                      <a:headEnd type="none" w="med" len="med"/>
+                      <a:tailEnd type="none" w="med" len="med"/>
+                    </a:lnL>
+                    <a:lnR w="12700" cap="flat" cmpd="sng" algn="ctr">
+                      <a:solidFill>
+                        <a:schemeClr val="tx1"/>
+                      </a:solidFill>
+                      <a:prstDash val="solid"/>
+                      <a:round/>
+                      <a:headEnd type="none" w="med" len="med"/>
+                      <a:tailEnd type="none" w="med" len="med"/>
+                    </a:lnR>
+                    <a:lnT w="12700" cap="flat" cmpd="sng" algn="ctr">
+                      <a:solidFill>
+                        <a:schemeClr val="tx1"/>
+                      </a:solidFill>
+                      <a:prstDash val="solid"/>
+                      <a:round/>
+                      <a:headEnd type="none" w="med" len="med"/>
+                      <a:tailEnd type="none" w="med" len="med"/>
+                    </a:lnT>
+                    <a:lnB w="12700" cap="flat" cmpd="sng" algn="ctr">
+                      <a:solidFill>
+                        <a:schemeClr val="tx1"/>
+                      </a:solidFill>
+                      <a:prstDash val="solid"/>
+                      <a:round/>
+                      <a:headEnd type="none" w="med" len="med"/>
+                      <a:tailEnd type="none" w="med" len="med"/>
+                    </a:lnB>
+                  </a:tcPr>
+                </a:tc>
+                <a:tc>
+                  <a:txBody>
+                    <a:bodyPr/>
+                    <a:lstStyle/>
+                    <a:p>
+                      <a:r>
+                        <a:rPr lang="en-IN" dirty="0"/>
+                        <a:t>Querying metadata</a:t>
+                      </a:r>
+                      <a:endParaRPr lang="en-GB" dirty="0"/>
+                    </a:p>
+                  </a:txBody>
+                  <a:tcPr>
+                    <a:lnL w="12700" cap="flat" cmpd="sng" algn="ctr">
+                      <a:solidFill>
+                        <a:schemeClr val="tx1"/>
+                      </a:solidFill>
+                      <a:prstDash val="solid"/>
+                      <a:round/>
+                      <a:headEnd type="none" w="med" len="med"/>
+                      <a:tailEnd type="none" w="med" len="med"/>
+                    </a:lnL>
+                    <a:lnR w="12700" cap="flat" cmpd="sng" algn="ctr">
+                      <a:solidFill>
+                        <a:schemeClr val="tx1"/>
+                      </a:solidFill>
+                      <a:prstDash val="solid"/>
+                      <a:round/>
+                      <a:headEnd type="none" w="med" len="med"/>
+                      <a:tailEnd type="none" w="med" len="med"/>
+                    </a:lnR>
+                    <a:lnT w="12700" cap="flat" cmpd="sng" algn="ctr">
+                      <a:solidFill>
+                        <a:schemeClr val="tx1"/>
+                      </a:solidFill>
+                      <a:prstDash val="solid"/>
+                      <a:round/>
+                      <a:headEnd type="none" w="med" len="med"/>
+                      <a:tailEnd type="none" w="med" len="med"/>
+                    </a:lnT>
+                    <a:lnB w="12700" cap="flat" cmpd="sng" algn="ctr">
+                      <a:solidFill>
+                        <a:schemeClr val="tx1"/>
+                      </a:solidFill>
+                      <a:prstDash val="solid"/>
+                      <a:round/>
+                      <a:headEnd type="none" w="med" len="med"/>
+                      <a:tailEnd type="none" w="med" len="med"/>
+                    </a:lnB>
+                  </a:tcPr>
+                </a:tc>
+                <a:extLst>
+                  <a:ext uri="{0D108BD9-81ED-4DB2-BD59-A6C34878D82A}">
+                    <a16:rowId xmlns:a16="http://schemas.microsoft.com/office/drawing/2014/main" val="62323159"/>
+                  </a:ext>
+                </a:extLst>
+              </a:tr>
+              <a:tr h="370840">
+                <a:tc>
+                  <a:txBody>
+                    <a:bodyPr/>
+                    <a:lstStyle/>
+                    <a:p>
+                      <a:r>
+                        <a:rPr lang="en-IN" dirty="0"/>
+                        <a:t>6</a:t>
+                      </a:r>
+                      <a:endParaRPr lang="en-GB" dirty="0"/>
+                    </a:p>
+                  </a:txBody>
+                  <a:tcPr>
+                    <a:lnL w="12700" cap="flat" cmpd="sng" algn="ctr">
+                      <a:solidFill>
+                        <a:schemeClr val="tx1"/>
+                      </a:solidFill>
+                      <a:prstDash val="solid"/>
+                      <a:round/>
+                      <a:headEnd type="none" w="med" len="med"/>
+                      <a:tailEnd type="none" w="med" len="med"/>
+                    </a:lnL>
+                    <a:lnR w="12700" cap="flat" cmpd="sng" algn="ctr">
+                      <a:solidFill>
+                        <a:schemeClr val="tx1"/>
+                      </a:solidFill>
+                      <a:prstDash val="solid"/>
+                      <a:round/>
+                      <a:headEnd type="none" w="med" len="med"/>
+                      <a:tailEnd type="none" w="med" len="med"/>
+                    </a:lnR>
+                    <a:lnT w="12700" cap="flat" cmpd="sng" algn="ctr">
+                      <a:solidFill>
+                        <a:schemeClr val="tx1"/>
+                      </a:solidFill>
+                      <a:prstDash val="solid"/>
+                      <a:round/>
+                      <a:headEnd type="none" w="med" len="med"/>
+                      <a:tailEnd type="none" w="med" len="med"/>
+                    </a:lnT>
+                    <a:lnB w="12700" cap="flat" cmpd="sng" algn="ctr">
+                      <a:solidFill>
+                        <a:schemeClr val="tx1"/>
+                      </a:solidFill>
+                      <a:prstDash val="solid"/>
+                      <a:round/>
+                      <a:headEnd type="none" w="med" len="med"/>
+                      <a:tailEnd type="none" w="med" len="med"/>
+                    </a:lnB>
+                  </a:tcPr>
+                </a:tc>
+                <a:tc>
+                  <a:txBody>
+                    <a:bodyPr/>
+                    <a:lstStyle/>
+                    <a:p>
+                      <a:pPr marL="0" marR="0" lvl="0" indent="0" algn="l" defTabSz="914400" rtl="0" eaLnBrk="1" fontAlgn="auto" latinLnBrk="0" hangingPunct="1">
+                        <a:lnSpc>
+                          <a:spcPct val="100000"/>
+                        </a:lnSpc>
+                        <a:spcBef>
+                          <a:spcPts val="0"/>
+                        </a:spcBef>
+                        <a:spcAft>
+                          <a:spcPts val="0"/>
+                        </a:spcAft>
+                        <a:buClrTx/>
+                        <a:buSzTx/>
+                        <a:buFontTx/>
+                        <a:buNone/>
+                        <a:tabLst/>
+                        <a:defRPr/>
+                      </a:pPr>
+                      <a:r>
+                        <a:rPr lang="nl-NL" dirty="0"/>
+                        <a:t>rag_6_chroma_db_langchain.py</a:t>
+                      </a:r>
+                      <a:endParaRPr lang="en-GB" dirty="0"/>
+                    </a:p>
+                  </a:txBody>
+                  <a:tcPr>
+                    <a:lnL w="12700" cap="flat" cmpd="sng" algn="ctr">
+                      <a:solidFill>
+                        <a:schemeClr val="tx1"/>
+                      </a:solidFill>
+                      <a:prstDash val="solid"/>
+                      <a:round/>
+                      <a:headEnd type="none" w="med" len="med"/>
+                      <a:tailEnd type="none" w="med" len="med"/>
+                    </a:lnL>
+                    <a:lnR w="12700" cap="flat" cmpd="sng" algn="ctr">
+                      <a:solidFill>
+                        <a:schemeClr val="tx1"/>
+                      </a:solidFill>
+                      <a:prstDash val="solid"/>
+                      <a:round/>
+                      <a:headEnd type="none" w="med" len="med"/>
+                      <a:tailEnd type="none" w="med" len="med"/>
+                    </a:lnR>
+                    <a:lnT w="12700" cap="flat" cmpd="sng" algn="ctr">
+                      <a:solidFill>
+                        <a:schemeClr val="tx1"/>
+                      </a:solidFill>
+                      <a:prstDash val="solid"/>
+                      <a:round/>
+                      <a:headEnd type="none" w="med" len="med"/>
+                      <a:tailEnd type="none" w="med" len="med"/>
+                    </a:lnT>
+                    <a:lnB w="12700" cap="flat" cmpd="sng" algn="ctr">
+                      <a:solidFill>
+                        <a:schemeClr val="tx1"/>
+                      </a:solidFill>
+                      <a:prstDash val="solid"/>
+                      <a:round/>
+                      <a:headEnd type="none" w="med" len="med"/>
+                      <a:tailEnd type="none" w="med" len="med"/>
+                    </a:lnB>
+                  </a:tcPr>
+                </a:tc>
+                <a:tc>
+                  <a:txBody>
+                    <a:bodyPr/>
+                    <a:lstStyle/>
+                    <a:p>
+                      <a:r>
+                        <a:rPr lang="en-IN" dirty="0"/>
+                        <a:t>Combining </a:t>
+                      </a:r>
+                      <a:r>
+                        <a:rPr lang="en-IN" dirty="0" err="1"/>
+                        <a:t>ChromaDB</a:t>
+                      </a:r>
+                      <a:r>
+                        <a:rPr lang="en-IN" dirty="0"/>
+                        <a:t> with </a:t>
+                      </a:r>
+                      <a:r>
+                        <a:rPr lang="en-IN" dirty="0" err="1"/>
+                        <a:t>LangChain</a:t>
+                      </a:r>
+                      <a:endParaRPr lang="en-GB" dirty="0"/>
+                    </a:p>
+                  </a:txBody>
+                  <a:tcPr>
+                    <a:lnL w="12700" cap="flat" cmpd="sng" algn="ctr">
+                      <a:solidFill>
+                        <a:schemeClr val="tx1"/>
+                      </a:solidFill>
+                      <a:prstDash val="solid"/>
+                      <a:round/>
+                      <a:headEnd type="none" w="med" len="med"/>
+                      <a:tailEnd type="none" w="med" len="med"/>
+                    </a:lnL>
+                    <a:lnR w="12700" cap="flat" cmpd="sng" algn="ctr">
+                      <a:solidFill>
+                        <a:schemeClr val="tx1"/>
+                      </a:solidFill>
+                      <a:prstDash val="solid"/>
+                      <a:round/>
+                      <a:headEnd type="none" w="med" len="med"/>
+                      <a:tailEnd type="none" w="med" len="med"/>
+                    </a:lnR>
+                    <a:lnT w="12700" cap="flat" cmpd="sng" algn="ctr">
+                      <a:solidFill>
+                        <a:schemeClr val="tx1"/>
+                      </a:solidFill>
+                      <a:prstDash val="solid"/>
+                      <a:round/>
+                      <a:headEnd type="none" w="med" len="med"/>
+                      <a:tailEnd type="none" w="med" len="med"/>
+                    </a:lnT>
+                    <a:lnB w="12700" cap="flat" cmpd="sng" algn="ctr">
+                      <a:solidFill>
+                        <a:schemeClr val="tx1"/>
+                      </a:solidFill>
+                      <a:prstDash val="solid"/>
+                      <a:round/>
+                      <a:headEnd type="none" w="med" len="med"/>
+                      <a:tailEnd type="none" w="med" len="med"/>
+                    </a:lnB>
+                  </a:tcPr>
+                </a:tc>
+                <a:extLst>
+                  <a:ext uri="{0D108BD9-81ED-4DB2-BD59-A6C34878D82A}">
+                    <a16:rowId xmlns:a16="http://schemas.microsoft.com/office/drawing/2014/main" val="3038069601"/>
+                  </a:ext>
+                </a:extLst>
+              </a:tr>
+            </a:tbl>
+          </a:graphicData>
+        </a:graphic>
+      </p:graphicFrame>
+    </p:spTree>
+    <p:extLst>
+      <p:ext uri="{BB962C8B-B14F-4D97-AF65-F5344CB8AC3E}">
+        <p14:creationId xmlns:p14="http://schemas.microsoft.com/office/powerpoint/2010/main" val="323828933"/>
       </p:ext>
     </p:extLst>
   </p:cSld>
